--- a/HCG_롯데케미칼_직무기반HR_제안서_Draft.pptx
+++ b/HCG_롯데케미칼_직무기반HR_제안서_Draft.pptx
@@ -8767,7 +8767,9 @@
           <a:prstGeom prst="roundRect">
             <a:avLst/>
           </a:prstGeom>
-          <a:noFill/>
+          <a:solidFill>
+            <a:srgbClr val="921F0B"/>
+          </a:solidFill>
           <a:ln>
             <a:noFill/>
           </a:ln>
@@ -8822,7 +8824,9 @@
           <a:prstGeom prst="roundRect">
             <a:avLst/>
           </a:prstGeom>
-          <a:noFill/>
+          <a:solidFill>
+            <a:srgbClr val="404040"/>
+          </a:solidFill>
           <a:ln>
             <a:noFill/>
           </a:ln>
@@ -10859,7 +10863,9 @@
           <a:prstGeom prst="roundRect">
             <a:avLst/>
           </a:prstGeom>
-          <a:noFill/>
+          <a:solidFill>
+            <a:srgbClr val="921F0B"/>
+          </a:solidFill>
           <a:ln>
             <a:noFill/>
           </a:ln>
@@ -11001,7 +11007,9 @@
           <a:prstGeom prst="roundRect">
             <a:avLst/>
           </a:prstGeom>
-          <a:noFill/>
+          <a:solidFill>
+            <a:srgbClr val="921F0B"/>
+          </a:solidFill>
           <a:ln>
             <a:noFill/>
           </a:ln>
@@ -11143,7 +11151,9 @@
           <a:prstGeom prst="roundRect">
             <a:avLst/>
           </a:prstGeom>
-          <a:noFill/>
+          <a:solidFill>
+            <a:srgbClr val="921F0B"/>
+          </a:solidFill>
           <a:ln>
             <a:noFill/>
           </a:ln>
@@ -11285,7 +11295,9 @@
           <a:prstGeom prst="roundRect">
             <a:avLst/>
           </a:prstGeom>
-          <a:noFill/>
+          <a:solidFill>
+            <a:srgbClr val="921F0B"/>
+          </a:solidFill>
           <a:ln>
             <a:noFill/>
           </a:ln>
@@ -11604,7 +11616,7 @@
           <a:lstStyle/>
           <a:p>
             <a:r>
-              <a:t>M1. 직무체계 표준화  Overview</a:t>
+              <a:t>직무체계 개선  Overview</a:t>
             </a:r>
           </a:p>
         </p:txBody>
@@ -11625,7 +11637,7 @@
           <a:lstStyle/>
           <a:p>
             <a:r>
-              <a:t>지주 가이드와 현장 맥락을 글로벌 표준+AI로 통합해 신속하게 표준 직무를 확립</a:t>
+              <a:t>지주사의 직무 분류 철학을 계승하되, AI 기반 글로벌 벤치마킹과 생산직 특성을 반영해 직무체계를 신속히 표준화</a:t>
             </a:r>
           </a:p>
         </p:txBody>
@@ -11638,13 +11650,15 @@
         </p:nvSpPr>
         <p:spPr>
           <a:xfrm>
-            <a:off x="434339" y="2286000"/>
-            <a:ext cx="2011680" cy="548640"/>
+            <a:off x="631850" y="1458468"/>
+            <a:ext cx="8641994" cy="304495"/>
           </a:xfrm>
           <a:prstGeom prst="roundRect">
             <a:avLst/>
           </a:prstGeom>
-          <a:noFill/>
+          <a:solidFill>
+            <a:srgbClr val="919191"/>
+          </a:solidFill>
           <a:ln>
             <a:noFill/>
           </a:ln>
@@ -11667,7 +11681,7 @@
           <a:bodyPr rtlCol="0" anchor="ctr" wrap="square" lIns="64008" rIns="36576" tIns="18288" bIns="18288"/>
           <a:lstStyle/>
           <a:p>
-            <a:pPr algn="ctr">
+            <a:pPr algn="l">
               <a:lnSpc>
                 <a:spcPct val="112000"/>
               </a:lnSpc>
@@ -11680,114 +11694,28 @@
                 <a:latin typeface="맑은 고딕"/>
                 <a:ea typeface="맑은 고딕"/>
               </a:rPr>
-              <a:t>지주 가이드
-해석</a:t>
-            </a:r>
-          </a:p>
-        </p:txBody>
-      </p:sp>
-      <p:sp>
-        <p:nvSpPr>
-          <p:cNvPr id="5" name="TextBox 4"/>
-          <p:cNvSpPr txBox="1"/>
-          <p:nvPr/>
-        </p:nvSpPr>
-        <p:spPr>
-          <a:xfrm>
-            <a:off x="434339" y="2880360"/>
-            <a:ext cx="2011680" cy="731520"/>
-          </a:xfrm>
-          <a:prstGeom prst="rect">
-            <a:avLst/>
-          </a:prstGeom>
-          <a:noFill/>
-          <a:ln>
-            <a:noFill/>
-          </a:ln>
-        </p:spPr>
-        <p:txBody>
-          <a:bodyPr wrap="square" lIns="27432" rIns="27432" tIns="18288" bIns="18288">
-            <a:spAutoFit/>
-          </a:bodyPr>
-          <a:lstStyle/>
-          <a:p>
-            <a:pPr algn="ctr">
-              <a:lnSpc>
-                <a:spcPct val="112000"/>
-              </a:lnSpc>
-            </a:pPr>
-            <a:r>
-              <a:rPr sz="900" b="0" i="0">
-                <a:solidFill>
-                  <a:srgbClr val="404040"/>
-                </a:solidFill>
-                <a:latin typeface="맑은 고딕"/>
-                <a:ea typeface="맑은 고딕"/>
-              </a:rPr>
-              <a:t>표준 직무
-원칙 decipher</a:t>
-            </a:r>
-          </a:p>
-        </p:txBody>
-      </p:sp>
-      <p:sp>
-        <p:nvSpPr>
-          <p:cNvPr id="6" name="TextBox 5"/>
-          <p:cNvSpPr txBox="1"/>
-          <p:nvPr/>
-        </p:nvSpPr>
-        <p:spPr>
-          <a:xfrm>
-            <a:off x="2473451" y="2423160"/>
-            <a:ext cx="182880" cy="274320"/>
-          </a:xfrm>
-          <a:prstGeom prst="rect">
-            <a:avLst/>
-          </a:prstGeom>
-          <a:noFill/>
-          <a:ln>
-            <a:noFill/>
-          </a:ln>
-        </p:spPr>
-        <p:txBody>
-          <a:bodyPr wrap="square" lIns="27432" rIns="27432" tIns="18288" bIns="18288">
-            <a:spAutoFit/>
-          </a:bodyPr>
-          <a:lstStyle/>
-          <a:p>
-            <a:pPr algn="ctr">
-              <a:lnSpc>
-                <a:spcPct val="112000"/>
-              </a:lnSpc>
-            </a:pPr>
-            <a:r>
-              <a:rPr sz="1300" b="0" i="0">
-                <a:solidFill>
-                  <a:srgbClr val="919191"/>
-                </a:solidFill>
-                <a:latin typeface="맑은 고딕"/>
-                <a:ea typeface="맑은 고딕"/>
-              </a:rPr>
-              <a:t>→</a:t>
-            </a:r>
-          </a:p>
-        </p:txBody>
-      </p:sp>
-      <p:sp>
-        <p:nvSpPr>
-          <p:cNvPr id="7" name="Rounded Rectangle 6"/>
+              <a:t>직무체계 개선 Overview</a:t>
+            </a:r>
+          </a:p>
+        </p:txBody>
+      </p:sp>
+      <p:sp>
+        <p:nvSpPr>
+          <p:cNvPr id="5" name="Rounded Rectangle 4"/>
           <p:cNvSpPr/>
           <p:nvPr/>
         </p:nvSpPr>
         <p:spPr>
           <a:xfrm>
-            <a:off x="2674620" y="2286000"/>
-            <a:ext cx="2011680" cy="548640"/>
+            <a:off x="630936" y="2633472"/>
+            <a:ext cx="2770632" cy="3813048"/>
           </a:xfrm>
           <a:prstGeom prst="roundRect">
             <a:avLst/>
           </a:prstGeom>
-          <a:noFill/>
+          <a:solidFill>
+            <a:srgbClr val="D9D9D9"/>
+          </a:solidFill>
           <a:ln>
             <a:noFill/>
           </a:ln>
@@ -11810,127 +11738,38 @@
           <a:bodyPr rtlCol="0" anchor="ctr" wrap="square" lIns="64008" rIns="36576" tIns="18288" bIns="18288"/>
           <a:lstStyle/>
           <a:p>
-            <a:pPr algn="ctr">
-              <a:lnSpc>
-                <a:spcPct val="112000"/>
-              </a:lnSpc>
-            </a:pPr>
-            <a:r>
-              <a:rPr sz="1100" b="1" i="0">
-                <a:solidFill>
-                  <a:srgbClr val="FFFFFF"/>
-                </a:solidFill>
-                <a:latin typeface="맑은 고딕"/>
-                <a:ea typeface="맑은 고딕"/>
-              </a:rPr>
-              <a:t>글로벌 BM
-+AI 수집</a:t>
-            </a:r>
-          </a:p>
-        </p:txBody>
-      </p:sp>
-      <p:sp>
-        <p:nvSpPr>
-          <p:cNvPr id="8" name="TextBox 7"/>
-          <p:cNvSpPr txBox="1"/>
-          <p:nvPr/>
-        </p:nvSpPr>
-        <p:spPr>
-          <a:xfrm>
-            <a:off x="2674620" y="2880360"/>
-            <a:ext cx="2011680" cy="731520"/>
-          </a:xfrm>
-          <a:prstGeom prst="rect">
-            <a:avLst/>
-          </a:prstGeom>
-          <a:noFill/>
-          <a:ln>
-            <a:noFill/>
-          </a:ln>
-        </p:spPr>
-        <p:txBody>
-          <a:bodyPr wrap="square" lIns="27432" rIns="27432" tIns="18288" bIns="18288">
-            <a:spAutoFit/>
-          </a:bodyPr>
-          <a:lstStyle/>
-          <a:p>
-            <a:pPr algn="ctr">
-              <a:lnSpc>
-                <a:spcPct val="112000"/>
-              </a:lnSpc>
-            </a:pPr>
-            <a:r>
-              <a:rPr sz="900" b="0" i="0">
-                <a:solidFill>
-                  <a:srgbClr val="404040"/>
-                </a:solidFill>
-                <a:latin typeface="맑은 고딕"/>
-                <a:ea typeface="맑은 고딕"/>
-              </a:rPr>
-              <a:t>국제표준 직무
-체계 수집</a:t>
-            </a:r>
-          </a:p>
-        </p:txBody>
-      </p:sp>
-      <p:sp>
-        <p:nvSpPr>
-          <p:cNvPr id="9" name="TextBox 8"/>
-          <p:cNvSpPr txBox="1"/>
-          <p:nvPr/>
-        </p:nvSpPr>
-        <p:spPr>
-          <a:xfrm>
-            <a:off x="4713732" y="2423160"/>
-            <a:ext cx="182880" cy="274320"/>
-          </a:xfrm>
-          <a:prstGeom prst="rect">
-            <a:avLst/>
-          </a:prstGeom>
-          <a:noFill/>
-          <a:ln>
-            <a:noFill/>
-          </a:ln>
-        </p:spPr>
-        <p:txBody>
-          <a:bodyPr wrap="square" lIns="27432" rIns="27432" tIns="18288" bIns="18288">
-            <a:spAutoFit/>
-          </a:bodyPr>
-          <a:lstStyle/>
-          <a:p>
-            <a:pPr algn="ctr">
-              <a:lnSpc>
-                <a:spcPct val="112000"/>
-              </a:lnSpc>
-            </a:pPr>
-            <a:r>
-              <a:rPr sz="1300" b="0" i="0">
-                <a:solidFill>
-                  <a:srgbClr val="919191"/>
-                </a:solidFill>
-                <a:latin typeface="맑은 고딕"/>
-                <a:ea typeface="맑은 고딕"/>
-              </a:rPr>
-              <a:t>→</a:t>
-            </a:r>
-          </a:p>
-        </p:txBody>
-      </p:sp>
-      <p:sp>
-        <p:nvSpPr>
-          <p:cNvPr id="10" name="Rounded Rectangle 9"/>
+            <a:pPr algn="l">
+              <a:lnSpc>
+                <a:spcPct val="112000"/>
+              </a:lnSpc>
+            </a:pPr>
+            <a:r>
+              <a:rPr sz="1100" b="0" i="0">
+                <a:latin typeface="맑은 고딕"/>
+                <a:ea typeface="맑은 고딕"/>
+              </a:rPr>
+              <a:t/>
+            </a:r>
+          </a:p>
+        </p:txBody>
+      </p:sp>
+      <p:sp>
+        <p:nvSpPr>
+          <p:cNvPr id="6" name="Rounded Rectangle 5"/>
           <p:cNvSpPr/>
           <p:nvPr/>
         </p:nvSpPr>
         <p:spPr>
           <a:xfrm>
-            <a:off x="4914900" y="2286000"/>
-            <a:ext cx="2011680" cy="548640"/>
+            <a:off x="630936" y="1920240"/>
+            <a:ext cx="2770632" cy="722376"/>
           </a:xfrm>
           <a:prstGeom prst="roundRect">
             <a:avLst/>
           </a:prstGeom>
-          <a:noFill/>
+          <a:solidFill>
+            <a:srgbClr val="921F0B"/>
+          </a:solidFill>
           <a:ln>
             <a:noFill/>
           </a:ln>
@@ -11966,22 +11805,21 @@
                 <a:latin typeface="맑은 고딕"/>
                 <a:ea typeface="맑은 고딕"/>
               </a:rPr>
-              <a:t>표준 직무
-도출</a:t>
-            </a:r>
-          </a:p>
-        </p:txBody>
-      </p:sp>
-      <p:sp>
-        <p:nvSpPr>
-          <p:cNvPr id="11" name="TextBox 10"/>
+              <a:t>Step 1. 직무 분석</a:t>
+            </a:r>
+          </a:p>
+        </p:txBody>
+      </p:sp>
+      <p:sp>
+        <p:nvSpPr>
+          <p:cNvPr id="7" name="TextBox 6"/>
           <p:cNvSpPr txBox="1"/>
           <p:nvPr/>
         </p:nvSpPr>
         <p:spPr>
           <a:xfrm>
-            <a:off x="4914900" y="2880360"/>
-            <a:ext cx="2011680" cy="731520"/>
+            <a:off x="722375" y="2724912"/>
+            <a:ext cx="2587751" cy="731520"/>
           </a:xfrm>
           <a:prstGeom prst="rect">
             <a:avLst/>
@@ -11997,7 +11835,7 @@
           </a:bodyPr>
           <a:lstStyle/>
           <a:p>
-            <a:pPr algn="ctr">
+            <a:pPr algn="l">
               <a:lnSpc>
                 <a:spcPct val="112000"/>
               </a:lnSpc>
@@ -12010,70 +11848,28 @@
                 <a:latin typeface="맑은 고딕"/>
                 <a:ea typeface="맑은 고딕"/>
               </a:rPr>
-              <a:t>사업장 공통
-표준 확립</a:t>
-            </a:r>
-          </a:p>
-        </p:txBody>
-      </p:sp>
-      <p:sp>
-        <p:nvSpPr>
-          <p:cNvPr id="12" name="TextBox 11"/>
-          <p:cNvSpPr txBox="1"/>
-          <p:nvPr/>
-        </p:nvSpPr>
-        <p:spPr>
-          <a:xfrm>
-            <a:off x="6954012" y="2423160"/>
-            <a:ext cx="182880" cy="274320"/>
-          </a:xfrm>
-          <a:prstGeom prst="rect">
-            <a:avLst/>
-          </a:prstGeom>
-          <a:noFill/>
-          <a:ln>
-            <a:noFill/>
-          </a:ln>
-        </p:spPr>
-        <p:txBody>
-          <a:bodyPr wrap="square" lIns="27432" rIns="27432" tIns="18288" bIns="18288">
-            <a:spAutoFit/>
-          </a:bodyPr>
-          <a:lstStyle/>
-          <a:p>
-            <a:pPr algn="ctr">
-              <a:lnSpc>
-                <a:spcPct val="112000"/>
-              </a:lnSpc>
-            </a:pPr>
-            <a:r>
-              <a:rPr sz="1300" b="0" i="0">
-                <a:solidFill>
-                  <a:srgbClr val="919191"/>
-                </a:solidFill>
-                <a:latin typeface="맑은 고딕"/>
-                <a:ea typeface="맑은 고딕"/>
-              </a:rPr>
-              <a:t>→</a:t>
-            </a:r>
-          </a:p>
-        </p:txBody>
-      </p:sp>
-      <p:sp>
-        <p:nvSpPr>
-          <p:cNvPr id="13" name="Rounded Rectangle 12"/>
+              <a:t>구성원 업무 목록·소요시간 등 직무 데이터 수집·분석</a:t>
+            </a:r>
+          </a:p>
+        </p:txBody>
+      </p:sp>
+      <p:sp>
+        <p:nvSpPr>
+          <p:cNvPr id="8" name="Rounded Rectangle 7"/>
           <p:cNvSpPr/>
           <p:nvPr/>
         </p:nvSpPr>
         <p:spPr>
           <a:xfrm>
-            <a:off x="7155180" y="2286000"/>
-            <a:ext cx="2011680" cy="548640"/>
+            <a:off x="722375" y="3529584"/>
+            <a:ext cx="2587751" cy="1325880"/>
           </a:xfrm>
           <a:prstGeom prst="roundRect">
             <a:avLst/>
           </a:prstGeom>
-          <a:noFill/>
+          <a:solidFill>
+            <a:srgbClr val="356CB5"/>
+          </a:solidFill>
           <a:ln>
             <a:noFill/>
           </a:ln>
@@ -12102,29 +11898,29 @@
               </a:lnSpc>
             </a:pPr>
             <a:r>
-              <a:rPr sz="1100" b="1" i="0">
+              <a:rPr sz="900" b="1" i="0">
                 <a:solidFill>
                   <a:srgbClr val="FFFFFF"/>
                 </a:solidFill>
                 <a:latin typeface="맑은 고딕"/>
                 <a:ea typeface="맑은 고딕"/>
               </a:rPr>
-              <a:t>사업장
-Custom</a:t>
-            </a:r>
-          </a:p>
-        </p:txBody>
-      </p:sp>
-      <p:sp>
-        <p:nvSpPr>
-          <p:cNvPr id="14" name="TextBox 13"/>
+              <a:t>AI 표준 직무체계
+글로벌 표준 직무 DB 활용</a:t>
+            </a:r>
+          </a:p>
+        </p:txBody>
+      </p:sp>
+      <p:sp>
+        <p:nvSpPr>
+          <p:cNvPr id="9" name="TextBox 8"/>
           <p:cNvSpPr txBox="1"/>
           <p:nvPr/>
         </p:nvSpPr>
         <p:spPr>
           <a:xfrm>
-            <a:off x="7155180" y="2880360"/>
-            <a:ext cx="2011680" cy="731520"/>
+            <a:off x="722375" y="4983480"/>
+            <a:ext cx="2587751" cy="1325880"/>
           </a:xfrm>
           <a:prstGeom prst="rect">
             <a:avLst/>
@@ -12140,12 +11936,166 @@
           </a:bodyPr>
           <a:lstStyle/>
           <a:p>
+            <a:pPr algn="l">
+              <a:lnSpc>
+                <a:spcPct val="112000"/>
+              </a:lnSpc>
+            </a:pPr>
+            <a:r>
+              <a:rPr sz="850" b="0" i="0">
+                <a:solidFill>
+                  <a:srgbClr val="404040"/>
+                </a:solidFill>
+                <a:latin typeface="맑은 고딕"/>
+                <a:ea typeface="맑은 고딕"/>
+              </a:rPr>
+              <a:t>BM 대상·부서 R&amp;R 기준 등 직무체계 수립 원칙 설정</a:t>
+            </a:r>
+          </a:p>
+        </p:txBody>
+      </p:sp>
+      <p:sp>
+        <p:nvSpPr>
+          <p:cNvPr id="10" name="Rounded Rectangle 9"/>
+          <p:cNvSpPr/>
+          <p:nvPr/>
+        </p:nvSpPr>
+        <p:spPr>
+          <a:xfrm>
+            <a:off x="3566160" y="2633472"/>
+            <a:ext cx="2770632" cy="3813048"/>
+          </a:xfrm>
+          <a:prstGeom prst="roundRect">
+            <a:avLst/>
+          </a:prstGeom>
+          <a:solidFill>
+            <a:srgbClr val="D9D9D9"/>
+          </a:solidFill>
+          <a:ln>
+            <a:noFill/>
+          </a:ln>
+        </p:spPr>
+        <p:style>
+          <a:lnRef idx="1">
+            <a:schemeClr val="accent1"/>
+          </a:lnRef>
+          <a:fillRef idx="3">
+            <a:schemeClr val="accent1"/>
+          </a:fillRef>
+          <a:effectRef idx="2">
+            <a:schemeClr val="accent1"/>
+          </a:effectRef>
+          <a:fontRef idx="minor">
+            <a:schemeClr val="lt1"/>
+          </a:fontRef>
+        </p:style>
+        <p:txBody>
+          <a:bodyPr rtlCol="0" anchor="ctr" wrap="square" lIns="64008" rIns="36576" tIns="18288" bIns="18288"/>
+          <a:lstStyle/>
+          <a:p>
+            <a:pPr algn="l">
+              <a:lnSpc>
+                <a:spcPct val="112000"/>
+              </a:lnSpc>
+            </a:pPr>
+            <a:r>
+              <a:rPr sz="1100" b="0" i="0">
+                <a:latin typeface="맑은 고딕"/>
+                <a:ea typeface="맑은 고딕"/>
+              </a:rPr>
+              <a:t/>
+            </a:r>
+          </a:p>
+        </p:txBody>
+      </p:sp>
+      <p:sp>
+        <p:nvSpPr>
+          <p:cNvPr id="11" name="Rounded Rectangle 10"/>
+          <p:cNvSpPr/>
+          <p:nvPr/>
+        </p:nvSpPr>
+        <p:spPr>
+          <a:xfrm>
+            <a:off x="3566160" y="1920240"/>
+            <a:ext cx="2770632" cy="722376"/>
+          </a:xfrm>
+          <a:prstGeom prst="roundRect">
+            <a:avLst/>
+          </a:prstGeom>
+          <a:solidFill>
+            <a:srgbClr val="921F0B"/>
+          </a:solidFill>
+          <a:ln>
+            <a:noFill/>
+          </a:ln>
+        </p:spPr>
+        <p:style>
+          <a:lnRef idx="1">
+            <a:schemeClr val="accent1"/>
+          </a:lnRef>
+          <a:fillRef idx="3">
+            <a:schemeClr val="accent1"/>
+          </a:fillRef>
+          <a:effectRef idx="2">
+            <a:schemeClr val="accent1"/>
+          </a:effectRef>
+          <a:fontRef idx="minor">
+            <a:schemeClr val="lt1"/>
+          </a:fontRef>
+        </p:style>
+        <p:txBody>
+          <a:bodyPr rtlCol="0" anchor="ctr" wrap="square" lIns="64008" rIns="36576" tIns="18288" bIns="18288"/>
+          <a:lstStyle/>
+          <a:p>
             <a:pPr algn="ctr">
               <a:lnSpc>
                 <a:spcPct val="112000"/>
               </a:lnSpc>
             </a:pPr>
             <a:r>
+              <a:rPr sz="1100" b="1" i="0">
+                <a:solidFill>
+                  <a:srgbClr val="FFFFFF"/>
+                </a:solidFill>
+                <a:latin typeface="맑은 고딕"/>
+                <a:ea typeface="맑은 고딕"/>
+              </a:rPr>
+              <a:t>Step 2. 직무 분류</a:t>
+            </a:r>
+          </a:p>
+        </p:txBody>
+      </p:sp>
+      <p:sp>
+        <p:nvSpPr>
+          <p:cNvPr id="12" name="TextBox 11"/>
+          <p:cNvSpPr txBox="1"/>
+          <p:nvPr/>
+        </p:nvSpPr>
+        <p:spPr>
+          <a:xfrm>
+            <a:off x="3657600" y="2724912"/>
+            <a:ext cx="2587751" cy="731520"/>
+          </a:xfrm>
+          <a:prstGeom prst="rect">
+            <a:avLst/>
+          </a:prstGeom>
+          <a:noFill/>
+          <a:ln>
+            <a:noFill/>
+          </a:ln>
+        </p:spPr>
+        <p:txBody>
+          <a:bodyPr wrap="square" lIns="27432" rIns="27432" tIns="18288" bIns="18288">
+            <a:spAutoFit/>
+          </a:bodyPr>
+          <a:lstStyle/>
+          <a:p>
+            <a:pPr algn="l">
+              <a:lnSpc>
+                <a:spcPct val="112000"/>
+              </a:lnSpc>
+            </a:pPr>
+            <a:r>
               <a:rPr sz="900" b="0" i="0">
                 <a:solidFill>
                   <a:srgbClr val="404040"/>
@@ -12153,8 +12103,420 @@
                 <a:latin typeface="맑은 고딕"/>
                 <a:ea typeface="맑은 고딕"/>
               </a:rPr>
-              <a:t>공정·교대 맥락
-반영 조정</a:t>
+              <a:t>가치사슬 / 업무 성격 기준 직군 정의 및 직무 도출</a:t>
+            </a:r>
+          </a:p>
+        </p:txBody>
+      </p:sp>
+      <p:sp>
+        <p:nvSpPr>
+          <p:cNvPr id="13" name="Rounded Rectangle 12"/>
+          <p:cNvSpPr/>
+          <p:nvPr/>
+        </p:nvSpPr>
+        <p:spPr>
+          <a:xfrm>
+            <a:off x="3657600" y="3529584"/>
+            <a:ext cx="2587751" cy="1325880"/>
+          </a:xfrm>
+          <a:prstGeom prst="roundRect">
+            <a:avLst/>
+          </a:prstGeom>
+          <a:solidFill>
+            <a:srgbClr val="356CB5"/>
+          </a:solidFill>
+          <a:ln>
+            <a:noFill/>
+          </a:ln>
+        </p:spPr>
+        <p:style>
+          <a:lnRef idx="1">
+            <a:schemeClr val="accent1"/>
+          </a:lnRef>
+          <a:fillRef idx="3">
+            <a:schemeClr val="accent1"/>
+          </a:fillRef>
+          <a:effectRef idx="2">
+            <a:schemeClr val="accent1"/>
+          </a:effectRef>
+          <a:fontRef idx="minor">
+            <a:schemeClr val="lt1"/>
+          </a:fontRef>
+        </p:style>
+        <p:txBody>
+          <a:bodyPr rtlCol="0" anchor="ctr" wrap="square" lIns="64008" rIns="36576" tIns="18288" bIns="18288"/>
+          <a:lstStyle/>
+          <a:p>
+            <a:pPr algn="ctr">
+              <a:lnSpc>
+                <a:spcPct val="112000"/>
+              </a:lnSpc>
+            </a:pPr>
+            <a:r>
+              <a:rPr sz="900" b="1" i="0">
+                <a:solidFill>
+                  <a:srgbClr val="FFFFFF"/>
+                </a:solidFill>
+                <a:latin typeface="맑은 고딕"/>
+                <a:ea typeface="맑은 고딕"/>
+              </a:rPr>
+              <a:t>직무 분류 AI Agent
+산업·업무 특성 기반 직무 정의</a:t>
+            </a:r>
+          </a:p>
+        </p:txBody>
+      </p:sp>
+      <p:sp>
+        <p:nvSpPr>
+          <p:cNvPr id="14" name="TextBox 13"/>
+          <p:cNvSpPr txBox="1"/>
+          <p:nvPr/>
+        </p:nvSpPr>
+        <p:spPr>
+          <a:xfrm>
+            <a:off x="3657600" y="4983480"/>
+            <a:ext cx="2587751" cy="1325880"/>
+          </a:xfrm>
+          <a:prstGeom prst="rect">
+            <a:avLst/>
+          </a:prstGeom>
+          <a:noFill/>
+          <a:ln>
+            <a:noFill/>
+          </a:ln>
+        </p:spPr>
+        <p:txBody>
+          <a:bodyPr wrap="square" lIns="27432" rIns="27432" tIns="18288" bIns="18288">
+            <a:spAutoFit/>
+          </a:bodyPr>
+          <a:lstStyle/>
+          <a:p>
+            <a:pPr algn="l">
+              <a:lnSpc>
+                <a:spcPct val="112000"/>
+              </a:lnSpc>
+            </a:pPr>
+            <a:r>
+              <a:rPr sz="850" b="0" i="0">
+                <a:solidFill>
+                  <a:srgbClr val="404040"/>
+                </a:solidFill>
+                <a:latin typeface="맑은 고딕"/>
+                <a:ea typeface="맑은 고딕"/>
+              </a:rPr>
+              <a:t>지주 Guide 정합 분류 기준 설정 + 세분화</a:t>
+            </a:r>
+          </a:p>
+        </p:txBody>
+      </p:sp>
+      <p:sp>
+        <p:nvSpPr>
+          <p:cNvPr id="15" name="Rounded Rectangle 14"/>
+          <p:cNvSpPr/>
+          <p:nvPr/>
+        </p:nvSpPr>
+        <p:spPr>
+          <a:xfrm>
+            <a:off x="6501384" y="2633472"/>
+            <a:ext cx="2770632" cy="3813048"/>
+          </a:xfrm>
+          <a:prstGeom prst="roundRect">
+            <a:avLst/>
+          </a:prstGeom>
+          <a:solidFill>
+            <a:srgbClr val="D9D9D9"/>
+          </a:solidFill>
+          <a:ln>
+            <a:noFill/>
+          </a:ln>
+        </p:spPr>
+        <p:style>
+          <a:lnRef idx="1">
+            <a:schemeClr val="accent1"/>
+          </a:lnRef>
+          <a:fillRef idx="3">
+            <a:schemeClr val="accent1"/>
+          </a:fillRef>
+          <a:effectRef idx="2">
+            <a:schemeClr val="accent1"/>
+          </a:effectRef>
+          <a:fontRef idx="minor">
+            <a:schemeClr val="lt1"/>
+          </a:fontRef>
+        </p:style>
+        <p:txBody>
+          <a:bodyPr rtlCol="0" anchor="ctr" wrap="square" lIns="64008" rIns="36576" tIns="18288" bIns="18288"/>
+          <a:lstStyle/>
+          <a:p>
+            <a:pPr algn="l">
+              <a:lnSpc>
+                <a:spcPct val="112000"/>
+              </a:lnSpc>
+            </a:pPr>
+            <a:r>
+              <a:rPr sz="1100" b="0" i="0">
+                <a:latin typeface="맑은 고딕"/>
+                <a:ea typeface="맑은 고딕"/>
+              </a:rPr>
+              <a:t/>
+            </a:r>
+          </a:p>
+        </p:txBody>
+      </p:sp>
+      <p:sp>
+        <p:nvSpPr>
+          <p:cNvPr id="16" name="Rounded Rectangle 15"/>
+          <p:cNvSpPr/>
+          <p:nvPr/>
+        </p:nvSpPr>
+        <p:spPr>
+          <a:xfrm>
+            <a:off x="6501384" y="1920240"/>
+            <a:ext cx="2770632" cy="722376"/>
+          </a:xfrm>
+          <a:prstGeom prst="roundRect">
+            <a:avLst/>
+          </a:prstGeom>
+          <a:solidFill>
+            <a:srgbClr val="921F0B"/>
+          </a:solidFill>
+          <a:ln>
+            <a:noFill/>
+          </a:ln>
+        </p:spPr>
+        <p:style>
+          <a:lnRef idx="1">
+            <a:schemeClr val="accent1"/>
+          </a:lnRef>
+          <a:fillRef idx="3">
+            <a:schemeClr val="accent1"/>
+          </a:fillRef>
+          <a:effectRef idx="2">
+            <a:schemeClr val="accent1"/>
+          </a:effectRef>
+          <a:fontRef idx="minor">
+            <a:schemeClr val="lt1"/>
+          </a:fontRef>
+        </p:style>
+        <p:txBody>
+          <a:bodyPr rtlCol="0" anchor="ctr" wrap="square" lIns="64008" rIns="36576" tIns="18288" bIns="18288"/>
+          <a:lstStyle/>
+          <a:p>
+            <a:pPr algn="ctr">
+              <a:lnSpc>
+                <a:spcPct val="112000"/>
+              </a:lnSpc>
+            </a:pPr>
+            <a:r>
+              <a:rPr sz="1100" b="1" i="0">
+                <a:solidFill>
+                  <a:srgbClr val="FFFFFF"/>
+                </a:solidFill>
+                <a:latin typeface="맑은 고딕"/>
+                <a:ea typeface="맑은 고딕"/>
+              </a:rPr>
+              <a:t>Step 3. 직무 평가</a:t>
+            </a:r>
+          </a:p>
+        </p:txBody>
+      </p:sp>
+      <p:sp>
+        <p:nvSpPr>
+          <p:cNvPr id="17" name="TextBox 16"/>
+          <p:cNvSpPr txBox="1"/>
+          <p:nvPr/>
+        </p:nvSpPr>
+        <p:spPr>
+          <a:xfrm>
+            <a:off x="6592824" y="2724912"/>
+            <a:ext cx="2587751" cy="731520"/>
+          </a:xfrm>
+          <a:prstGeom prst="rect">
+            <a:avLst/>
+          </a:prstGeom>
+          <a:noFill/>
+          <a:ln>
+            <a:noFill/>
+          </a:ln>
+        </p:spPr>
+        <p:txBody>
+          <a:bodyPr wrap="square" lIns="27432" rIns="27432" tIns="18288" bIns="18288">
+            <a:spAutoFit/>
+          </a:bodyPr>
+          <a:lstStyle/>
+          <a:p>
+            <a:pPr algn="l">
+              <a:lnSpc>
+                <a:spcPct val="112000"/>
+              </a:lnSpc>
+            </a:pPr>
+            <a:r>
+              <a:rPr sz="900" b="0" i="0">
+                <a:solidFill>
+                  <a:srgbClr val="404040"/>
+                </a:solidFill>
+                <a:latin typeface="맑은 고딕"/>
+                <a:ea typeface="맑은 고딕"/>
+              </a:rPr>
+              <a:t>직무가치 기준 점수화·등급 도출</a:t>
+            </a:r>
+          </a:p>
+        </p:txBody>
+      </p:sp>
+      <p:sp>
+        <p:nvSpPr>
+          <p:cNvPr id="18" name="Rounded Rectangle 17"/>
+          <p:cNvSpPr/>
+          <p:nvPr/>
+        </p:nvSpPr>
+        <p:spPr>
+          <a:xfrm>
+            <a:off x="6592824" y="3529584"/>
+            <a:ext cx="2587751" cy="1325880"/>
+          </a:xfrm>
+          <a:prstGeom prst="roundRect">
+            <a:avLst/>
+          </a:prstGeom>
+          <a:solidFill>
+            <a:srgbClr val="356CB5"/>
+          </a:solidFill>
+          <a:ln>
+            <a:noFill/>
+          </a:ln>
+        </p:spPr>
+        <p:style>
+          <a:lnRef idx="1">
+            <a:schemeClr val="accent1"/>
+          </a:lnRef>
+          <a:fillRef idx="3">
+            <a:schemeClr val="accent1"/>
+          </a:fillRef>
+          <a:effectRef idx="2">
+            <a:schemeClr val="accent1"/>
+          </a:effectRef>
+          <a:fontRef idx="minor">
+            <a:schemeClr val="lt1"/>
+          </a:fontRef>
+        </p:style>
+        <p:txBody>
+          <a:bodyPr rtlCol="0" anchor="ctr" wrap="square" lIns="64008" rIns="36576" tIns="18288" bIns="18288"/>
+          <a:lstStyle/>
+          <a:p>
+            <a:pPr algn="ctr">
+              <a:lnSpc>
+                <a:spcPct val="112000"/>
+              </a:lnSpc>
+            </a:pPr>
+            <a:r>
+              <a:rPr sz="900" b="1" i="0">
+                <a:solidFill>
+                  <a:srgbClr val="FFFFFF"/>
+                </a:solidFill>
+                <a:latin typeface="맑은 고딕"/>
+                <a:ea typeface="맑은 고딕"/>
+              </a:rPr>
+              <a:t>직무평가 AI Persona
+TF 합의 기준 기반 평가</a:t>
+            </a:r>
+          </a:p>
+        </p:txBody>
+      </p:sp>
+      <p:sp>
+        <p:nvSpPr>
+          <p:cNvPr id="19" name="TextBox 18"/>
+          <p:cNvSpPr txBox="1"/>
+          <p:nvPr/>
+        </p:nvSpPr>
+        <p:spPr>
+          <a:xfrm>
+            <a:off x="6592824" y="4983480"/>
+            <a:ext cx="2587751" cy="1325880"/>
+          </a:xfrm>
+          <a:prstGeom prst="rect">
+            <a:avLst/>
+          </a:prstGeom>
+          <a:noFill/>
+          <a:ln>
+            <a:noFill/>
+          </a:ln>
+        </p:spPr>
+        <p:txBody>
+          <a:bodyPr wrap="square" lIns="27432" rIns="27432" tIns="18288" bIns="18288">
+            <a:spAutoFit/>
+          </a:bodyPr>
+          <a:lstStyle/>
+          <a:p>
+            <a:pPr algn="l">
+              <a:lnSpc>
+                <a:spcPct val="112000"/>
+              </a:lnSpc>
+            </a:pPr>
+            <a:r>
+              <a:rPr sz="850" b="0" i="0">
+                <a:solidFill>
+                  <a:srgbClr val="404040"/>
+                </a:solidFill>
+                <a:latin typeface="맑은 고딕"/>
+                <a:ea typeface="맑은 고딕"/>
+              </a:rPr>
+              <a:t>직무평가 원칙·Calibration·Communication</a:t>
+            </a:r>
+          </a:p>
+        </p:txBody>
+      </p:sp>
+      <p:sp>
+        <p:nvSpPr>
+          <p:cNvPr id="20" name="Rounded Rectangle 19"/>
+          <p:cNvSpPr/>
+          <p:nvPr/>
+        </p:nvSpPr>
+        <p:spPr>
+          <a:xfrm>
+            <a:off x="8741664" y="1472184"/>
+            <a:ext cx="530352" cy="246888"/>
+          </a:xfrm>
+          <a:prstGeom prst="roundRect">
+            <a:avLst/>
+          </a:prstGeom>
+          <a:solidFill>
+            <a:srgbClr val="D9D9D9"/>
+          </a:solidFill>
+          <a:ln>
+            <a:noFill/>
+          </a:ln>
+        </p:spPr>
+        <p:style>
+          <a:lnRef idx="1">
+            <a:schemeClr val="accent1"/>
+          </a:lnRef>
+          <a:fillRef idx="3">
+            <a:schemeClr val="accent1"/>
+          </a:fillRef>
+          <a:effectRef idx="2">
+            <a:schemeClr val="accent1"/>
+          </a:effectRef>
+          <a:fontRef idx="minor">
+            <a:schemeClr val="lt1"/>
+          </a:fontRef>
+        </p:style>
+        <p:txBody>
+          <a:bodyPr rtlCol="0" anchor="ctr" wrap="square" lIns="64008" rIns="36576" tIns="18288" bIns="18288"/>
+          <a:lstStyle/>
+          <a:p>
+            <a:pPr algn="ctr">
+              <a:lnSpc>
+                <a:spcPct val="112000"/>
+              </a:lnSpc>
+            </a:pPr>
+            <a:r>
+              <a:rPr sz="800" b="0" i="0">
+                <a:solidFill>
+                  <a:srgbClr val="404040"/>
+                </a:solidFill>
+                <a:latin typeface="맑은 고딕"/>
+                <a:ea typeface="맑은 고딕"/>
+              </a:rPr>
+              <a:t>예시적</a:t>
             </a:r>
           </a:p>
         </p:txBody>
@@ -12233,7 +12595,9 @@
           <a:prstGeom prst="roundRect">
             <a:avLst/>
           </a:prstGeom>
-          <a:noFill/>
+          <a:solidFill>
+            <a:srgbClr val="921F0B"/>
+          </a:solidFill>
           <a:ln>
             <a:noFill/>
           </a:ln>
@@ -12376,7 +12740,9 @@
           <a:prstGeom prst="roundRect">
             <a:avLst/>
           </a:prstGeom>
-          <a:noFill/>
+          <a:solidFill>
+            <a:srgbClr val="921F0B"/>
+          </a:solidFill>
           <a:ln>
             <a:noFill/>
           </a:ln>
@@ -12519,7 +12885,9 @@
           <a:prstGeom prst="roundRect">
             <a:avLst/>
           </a:prstGeom>
-          <a:noFill/>
+          <a:solidFill>
+            <a:srgbClr val="921F0B"/>
+          </a:solidFill>
           <a:ln>
             <a:noFill/>
           </a:ln>
@@ -12662,7 +13030,9 @@
           <a:prstGeom prst="roundRect">
             <a:avLst/>
           </a:prstGeom>
-          <a:noFill/>
+          <a:solidFill>
+            <a:srgbClr val="921F0B"/>
+          </a:solidFill>
           <a:ln>
             <a:noFill/>
           </a:ln>
@@ -13022,7 +13392,9 @@
           <a:prstGeom prst="roundRect">
             <a:avLst/>
           </a:prstGeom>
-          <a:noFill/>
+          <a:solidFill>
+            <a:srgbClr val="921F0B"/>
+          </a:solidFill>
           <a:ln>
             <a:noFill/>
           </a:ln>
@@ -13165,7 +13537,9 @@
           <a:prstGeom prst="roundRect">
             <a:avLst/>
           </a:prstGeom>
-          <a:noFill/>
+          <a:solidFill>
+            <a:srgbClr val="921F0B"/>
+          </a:solidFill>
           <a:ln>
             <a:noFill/>
           </a:ln>
@@ -13308,7 +13682,9 @@
           <a:prstGeom prst="roundRect">
             <a:avLst/>
           </a:prstGeom>
-          <a:noFill/>
+          <a:solidFill>
+            <a:srgbClr val="921F0B"/>
+          </a:solidFill>
           <a:ln>
             <a:noFill/>
           </a:ln>
@@ -13451,7 +13827,9 @@
           <a:prstGeom prst="roundRect">
             <a:avLst/>
           </a:prstGeom>
-          <a:noFill/>
+          <a:solidFill>
+            <a:srgbClr val="921F0B"/>
+          </a:solidFill>
           <a:ln>
             <a:noFill/>
           </a:ln>
@@ -15191,7 +15569,9 @@
           <a:prstGeom prst="roundRect">
             <a:avLst/>
           </a:prstGeom>
-          <a:noFill/>
+          <a:solidFill>
+            <a:srgbClr val="921F0B"/>
+          </a:solidFill>
           <a:ln>
             <a:noFill/>
           </a:ln>
@@ -15246,7 +15626,9 @@
           <a:prstGeom prst="roundRect">
             <a:avLst/>
           </a:prstGeom>
-          <a:noFill/>
+          <a:solidFill>
+            <a:srgbClr val="404040"/>
+          </a:solidFill>
           <a:ln>
             <a:noFill/>
           </a:ln>
@@ -15777,7 +16159,7 @@
           <a:lstStyle/>
           <a:p>
             <a:r>
-              <a:t>직군별 차별화 평가모델</a:t>
+              <a:t>평가제도 개선  직군별 차별화 평가모델</a:t>
             </a:r>
           </a:p>
         </p:txBody>
@@ -15798,26 +16180,157 @@
           <a:lstStyle/>
           <a:p>
             <a:r>
-              <a:t>직무 특성을 도출해 일의 성격에 따라 평가 방식을 차등 적용</a:t>
-            </a:r>
-          </a:p>
-        </p:txBody>
-      </p:sp>
-      <p:sp>
-        <p:nvSpPr>
-          <p:cNvPr id="4" name="Rounded Rectangle 3"/>
+              <a:t>각 직군·현장의 업무 특성 차이를 반영해 평가제도의 방향성을 차별화</a:t>
+            </a:r>
+          </a:p>
+        </p:txBody>
+      </p:sp>
+      <p:sp>
+        <p:nvSpPr>
+          <p:cNvPr id="4" name="TextBox 3"/>
+          <p:cNvSpPr txBox="1"/>
+          <p:nvPr/>
+        </p:nvSpPr>
+        <p:spPr>
+          <a:xfrm>
+            <a:off x="1828800" y="1874519"/>
+            <a:ext cx="1892807" cy="274320"/>
+          </a:xfrm>
+          <a:prstGeom prst="rect">
+            <a:avLst/>
+          </a:prstGeom>
+          <a:noFill/>
+          <a:ln>
+            <a:noFill/>
+          </a:ln>
+        </p:spPr>
+        <p:txBody>
+          <a:bodyPr wrap="square" lIns="27432" rIns="27432" tIns="18288" bIns="18288">
+            <a:spAutoFit/>
+          </a:bodyPr>
+          <a:lstStyle/>
+          <a:p>
+            <a:pPr algn="ctr">
+              <a:lnSpc>
+                <a:spcPct val="112000"/>
+              </a:lnSpc>
+            </a:pPr>
+            <a:r>
+              <a:rPr sz="900" b="1" i="0">
+                <a:solidFill>
+                  <a:srgbClr val="919191"/>
+                </a:solidFill>
+                <a:latin typeface="맑은 고딕"/>
+                <a:ea typeface="맑은 고딕"/>
+              </a:rPr>
+              <a:t>업무 특성</a:t>
+            </a:r>
+          </a:p>
+        </p:txBody>
+      </p:sp>
+      <p:sp>
+        <p:nvSpPr>
+          <p:cNvPr id="5" name="TextBox 4"/>
+          <p:cNvSpPr txBox="1"/>
+          <p:nvPr/>
+        </p:nvSpPr>
+        <p:spPr>
+          <a:xfrm>
+            <a:off x="3849624" y="1874519"/>
+            <a:ext cx="2450592" cy="274320"/>
+          </a:xfrm>
+          <a:prstGeom prst="rect">
+            <a:avLst/>
+          </a:prstGeom>
+          <a:noFill/>
+          <a:ln>
+            <a:noFill/>
+          </a:ln>
+        </p:spPr>
+        <p:txBody>
+          <a:bodyPr wrap="square" lIns="27432" rIns="27432" tIns="18288" bIns="18288">
+            <a:spAutoFit/>
+          </a:bodyPr>
+          <a:lstStyle/>
+          <a:p>
+            <a:pPr algn="ctr">
+              <a:lnSpc>
+                <a:spcPct val="112000"/>
+              </a:lnSpc>
+            </a:pPr>
+            <a:r>
+              <a:rPr sz="900" b="1" i="0">
+                <a:solidFill>
+                  <a:srgbClr val="919191"/>
+                </a:solidFill>
+                <a:latin typeface="맑은 고딕"/>
+                <a:ea typeface="맑은 고딕"/>
+              </a:rPr>
+              <a:t>핵심 방향성</a:t>
+            </a:r>
+          </a:p>
+        </p:txBody>
+      </p:sp>
+      <p:sp>
+        <p:nvSpPr>
+          <p:cNvPr id="6" name="TextBox 5"/>
+          <p:cNvSpPr txBox="1"/>
+          <p:nvPr/>
+        </p:nvSpPr>
+        <p:spPr>
+          <a:xfrm>
+            <a:off x="6922008" y="1874519"/>
+            <a:ext cx="2368296" cy="274320"/>
+          </a:xfrm>
+          <a:prstGeom prst="rect">
+            <a:avLst/>
+          </a:prstGeom>
+          <a:noFill/>
+          <a:ln>
+            <a:noFill/>
+          </a:ln>
+        </p:spPr>
+        <p:txBody>
+          <a:bodyPr wrap="square" lIns="27432" rIns="27432" tIns="18288" bIns="18288">
+            <a:spAutoFit/>
+          </a:bodyPr>
+          <a:lstStyle/>
+          <a:p>
+            <a:pPr algn="ctr">
+              <a:lnSpc>
+                <a:spcPct val="112000"/>
+              </a:lnSpc>
+            </a:pPr>
+            <a:r>
+              <a:rPr sz="900" b="1" i="0">
+                <a:solidFill>
+                  <a:srgbClr val="919191"/>
+                </a:solidFill>
+                <a:latin typeface="맑은 고딕"/>
+                <a:ea typeface="맑은 고딕"/>
+              </a:rPr>
+              <a:t>평가 반영방안</a:t>
+            </a:r>
+          </a:p>
+        </p:txBody>
+      </p:sp>
+      <p:sp>
+        <p:nvSpPr>
+          <p:cNvPr id="7" name="Rounded Rectangle 6"/>
           <p:cNvSpPr/>
           <p:nvPr/>
         </p:nvSpPr>
         <p:spPr>
           <a:xfrm>
-            <a:off x="434339" y="2286000"/>
-            <a:ext cx="2011680" cy="548640"/>
+            <a:off x="630936" y="2249424"/>
+            <a:ext cx="1143000" cy="886968"/>
           </a:xfrm>
           <a:prstGeom prst="roundRect">
             <a:avLst/>
           </a:prstGeom>
-          <a:noFill/>
+          <a:solidFill>
+            <a:srgbClr val="921F0B"/>
+          </a:solidFill>
           <a:ln>
             <a:noFill/>
           </a:ln>
@@ -15846,28 +16359,28 @@
               </a:lnSpc>
             </a:pPr>
             <a:r>
-              <a:rPr sz="1100" b="1" i="0">
+              <a:rPr sz="1000" b="1" i="0">
                 <a:solidFill>
                   <a:srgbClr val="FFFFFF"/>
                 </a:solidFill>
                 <a:latin typeface="맑은 고딕"/>
                 <a:ea typeface="맑은 고딕"/>
               </a:rPr>
-              <a:t>성과 지향</a:t>
-            </a:r>
-          </a:p>
-        </p:txBody>
-      </p:sp>
-      <p:sp>
-        <p:nvSpPr>
-          <p:cNvPr id="5" name="TextBox 4"/>
+              <a:t>R&amp;D·신사업</a:t>
+            </a:r>
+          </a:p>
+        </p:txBody>
+      </p:sp>
+      <p:sp>
+        <p:nvSpPr>
+          <p:cNvPr id="8" name="TextBox 7"/>
           <p:cNvSpPr txBox="1"/>
           <p:nvPr/>
         </p:nvSpPr>
         <p:spPr>
           <a:xfrm>
-            <a:off x="434339" y="2880360"/>
-            <a:ext cx="2011680" cy="731520"/>
+            <a:off x="1828800" y="2249424"/>
+            <a:ext cx="1892807" cy="886968"/>
           </a:xfrm>
           <a:prstGeom prst="rect">
             <a:avLst/>
@@ -15883,85 +16396,45 @@
           </a:bodyPr>
           <a:lstStyle/>
           <a:p>
-            <a:pPr algn="ctr">
-              <a:lnSpc>
-                <a:spcPct val="112000"/>
-              </a:lnSpc>
-            </a:pPr>
-            <a:r>
-              <a:rPr sz="900" b="0" i="0">
+            <a:pPr algn="l">
+              <a:lnSpc>
+                <a:spcPct val="112000"/>
+              </a:lnSpc>
+            </a:pPr>
+            <a:r>
+              <a:rPr sz="850" b="0" i="0">
                 <a:solidFill>
                   <a:srgbClr val="404040"/>
                 </a:solidFill>
                 <a:latin typeface="맑은 고딕"/>
                 <a:ea typeface="맑은 고딕"/>
               </a:rPr>
-              <a:t>정량 KPI 중심
-(영업·사업)</a:t>
-            </a:r>
-          </a:p>
-        </p:txBody>
-      </p:sp>
-      <p:sp>
-        <p:nvSpPr>
-          <p:cNvPr id="6" name="TextBox 5"/>
-          <p:cNvSpPr txBox="1"/>
-          <p:nvPr/>
-        </p:nvSpPr>
-        <p:spPr>
-          <a:xfrm>
-            <a:off x="2473451" y="2423160"/>
-            <a:ext cx="182880" cy="274320"/>
-          </a:xfrm>
-          <a:prstGeom prst="rect">
-            <a:avLst/>
-          </a:prstGeom>
-          <a:noFill/>
-          <a:ln>
-            <a:noFill/>
-          </a:ln>
-        </p:spPr>
-        <p:txBody>
-          <a:bodyPr wrap="square" lIns="27432" rIns="27432" tIns="18288" bIns="18288">
-            <a:spAutoFit/>
-          </a:bodyPr>
-          <a:lstStyle/>
-          <a:p>
-            <a:pPr algn="ctr">
-              <a:lnSpc>
-                <a:spcPct val="112000"/>
-              </a:lnSpc>
-            </a:pPr>
-            <a:r>
-              <a:rPr sz="1300" b="0" i="0">
-                <a:solidFill>
-                  <a:srgbClr val="919191"/>
-                </a:solidFill>
-                <a:latin typeface="맑은 고딕"/>
-                <a:ea typeface="맑은 고딕"/>
-              </a:rPr>
-              <a:t>→</a:t>
-            </a:r>
-          </a:p>
-        </p:txBody>
-      </p:sp>
-      <p:sp>
-        <p:nvSpPr>
-          <p:cNvPr id="7" name="Rounded Rectangle 6"/>
+              <a:t>사업/제품/신기술 개발에 장기 소요, 프로젝트 위주 수행</a:t>
+            </a:r>
+          </a:p>
+        </p:txBody>
+      </p:sp>
+      <p:sp>
+        <p:nvSpPr>
+          <p:cNvPr id="9" name="Rounded Rectangle 8"/>
           <p:cNvSpPr/>
           <p:nvPr/>
         </p:nvSpPr>
         <p:spPr>
           <a:xfrm>
-            <a:off x="2674620" y="2286000"/>
-            <a:ext cx="2011680" cy="548640"/>
+            <a:off x="3849624" y="2249424"/>
+            <a:ext cx="2450592" cy="886968"/>
           </a:xfrm>
           <a:prstGeom prst="roundRect">
             <a:avLst/>
           </a:prstGeom>
-          <a:noFill/>
-          <a:ln>
-            <a:noFill/>
+          <a:solidFill>
+            <a:srgbClr val="D9D9D9"/>
+          </a:solidFill>
+          <a:ln w="6350">
+            <a:solidFill>
+              <a:schemeClr val="dk1"/>
+            </a:solidFill>
           </a:ln>
         </p:spPr>
         <p:style>
@@ -15988,28 +16461,28 @@
               </a:lnSpc>
             </a:pPr>
             <a:r>
-              <a:rPr sz="1100" b="1" i="0">
-                <a:solidFill>
-                  <a:srgbClr val="FFFFFF"/>
-                </a:solidFill>
-                <a:latin typeface="맑은 고딕"/>
-                <a:ea typeface="맑은 고딕"/>
-              </a:rPr>
-              <a:t>투입 지향</a:t>
-            </a:r>
-          </a:p>
-        </p:txBody>
-      </p:sp>
-      <p:sp>
-        <p:nvSpPr>
-          <p:cNvPr id="8" name="TextBox 7"/>
+              <a:rPr sz="900" b="1" i="0">
+                <a:solidFill>
+                  <a:srgbClr val="921F0B"/>
+                </a:solidFill>
+                <a:latin typeface="맑은 고딕"/>
+                <a:ea typeface="맑은 고딕"/>
+              </a:rPr>
+              <a:t>“마일스톤 중심의 장기 성과 인정”</a:t>
+            </a:r>
+          </a:p>
+        </p:txBody>
+      </p:sp>
+      <p:sp>
+        <p:nvSpPr>
+          <p:cNvPr id="10" name="TextBox 9"/>
           <p:cNvSpPr txBox="1"/>
           <p:nvPr/>
         </p:nvSpPr>
         <p:spPr>
           <a:xfrm>
-            <a:off x="2674620" y="2880360"/>
-            <a:ext cx="2011680" cy="731520"/>
+            <a:off x="6391656" y="2523744"/>
+            <a:ext cx="429768" cy="320040"/>
           </a:xfrm>
           <a:prstGeom prst="rect">
             <a:avLst/>
@@ -16031,29 +16504,28 @@
               </a:lnSpc>
             </a:pPr>
             <a:r>
-              <a:rPr sz="900" b="0" i="0">
-                <a:solidFill>
-                  <a:srgbClr val="404040"/>
-                </a:solidFill>
-                <a:latin typeface="맑은 고딕"/>
-                <a:ea typeface="맑은 고딕"/>
-              </a:rPr>
-              <a:t>공정·시간 기반
-(생산직)</a:t>
-            </a:r>
-          </a:p>
-        </p:txBody>
-      </p:sp>
-      <p:sp>
-        <p:nvSpPr>
-          <p:cNvPr id="9" name="TextBox 8"/>
+              <a:rPr sz="1200" b="0" i="0">
+                <a:solidFill>
+                  <a:srgbClr val="919191"/>
+                </a:solidFill>
+                <a:latin typeface="맑은 고딕"/>
+                <a:ea typeface="맑은 고딕"/>
+              </a:rPr>
+              <a:t>▶</a:t>
+            </a:r>
+          </a:p>
+        </p:txBody>
+      </p:sp>
+      <p:sp>
+        <p:nvSpPr>
+          <p:cNvPr id="11" name="TextBox 10"/>
           <p:cNvSpPr txBox="1"/>
           <p:nvPr/>
         </p:nvSpPr>
         <p:spPr>
           <a:xfrm>
-            <a:off x="4713732" y="2423160"/>
-            <a:ext cx="182880" cy="274320"/>
+            <a:off x="6922008" y="2249424"/>
+            <a:ext cx="2368296" cy="886968"/>
           </a:xfrm>
           <a:prstGeom prst="rect">
             <a:avLst/>
@@ -16069,39 +16541,41 @@
           </a:bodyPr>
           <a:lstStyle/>
           <a:p>
-            <a:pPr algn="ctr">
-              <a:lnSpc>
-                <a:spcPct val="112000"/>
-              </a:lnSpc>
-            </a:pPr>
-            <a:r>
-              <a:rPr sz="1300" b="0" i="0">
-                <a:solidFill>
-                  <a:srgbClr val="919191"/>
-                </a:solidFill>
-                <a:latin typeface="맑은 고딕"/>
-                <a:ea typeface="맑은 고딕"/>
-              </a:rPr>
-              <a:t>→</a:t>
-            </a:r>
-          </a:p>
-        </p:txBody>
-      </p:sp>
-      <p:sp>
-        <p:nvSpPr>
-          <p:cNvPr id="10" name="Rounded Rectangle 9"/>
+            <a:pPr algn="l">
+              <a:lnSpc>
+                <a:spcPct val="112000"/>
+              </a:lnSpc>
+            </a:pPr>
+            <a:r>
+              <a:rPr sz="850" b="0" i="0">
+                <a:solidFill>
+                  <a:srgbClr val="404040"/>
+                </a:solidFill>
+                <a:latin typeface="맑은 고딕"/>
+                <a:ea typeface="맑은 고딕"/>
+              </a:rPr>
+              <a:t>마일스톤·Output 평가, R&amp;D 장기 성과급 체계</a:t>
+            </a:r>
+          </a:p>
+        </p:txBody>
+      </p:sp>
+      <p:sp>
+        <p:nvSpPr>
+          <p:cNvPr id="12" name="Rounded Rectangle 11"/>
           <p:cNvSpPr/>
           <p:nvPr/>
         </p:nvSpPr>
         <p:spPr>
           <a:xfrm>
-            <a:off x="4914900" y="2286000"/>
-            <a:ext cx="2011680" cy="548640"/>
+            <a:off x="630936" y="3246120"/>
+            <a:ext cx="1143000" cy="886968"/>
           </a:xfrm>
           <a:prstGeom prst="roundRect">
             <a:avLst/>
           </a:prstGeom>
-          <a:noFill/>
+          <a:solidFill>
+            <a:srgbClr val="921F0B"/>
+          </a:solidFill>
           <a:ln>
             <a:noFill/>
           </a:ln>
@@ -16130,28 +16604,28 @@
               </a:lnSpc>
             </a:pPr>
             <a:r>
-              <a:rPr sz="1100" b="1" i="0">
+              <a:rPr sz="1000" b="1" i="0">
                 <a:solidFill>
                   <a:srgbClr val="FFFFFF"/>
                 </a:solidFill>
                 <a:latin typeface="맑은 고딕"/>
                 <a:ea typeface="맑은 고딕"/>
               </a:rPr>
-              <a:t>역량/전문</a:t>
-            </a:r>
-          </a:p>
-        </p:txBody>
-      </p:sp>
-      <p:sp>
-        <p:nvSpPr>
-          <p:cNvPr id="11" name="TextBox 10"/>
+              <a:t>영업</a:t>
+            </a:r>
+          </a:p>
+        </p:txBody>
+      </p:sp>
+      <p:sp>
+        <p:nvSpPr>
+          <p:cNvPr id="13" name="TextBox 12"/>
           <p:cNvSpPr txBox="1"/>
           <p:nvPr/>
         </p:nvSpPr>
         <p:spPr>
           <a:xfrm>
-            <a:off x="4914900" y="2880360"/>
-            <a:ext cx="2011680" cy="731520"/>
+            <a:off x="1828800" y="3246120"/>
+            <a:ext cx="1892807" cy="886968"/>
           </a:xfrm>
           <a:prstGeom prst="rect">
             <a:avLst/>
@@ -16167,85 +16641,45 @@
           </a:bodyPr>
           <a:lstStyle/>
           <a:p>
-            <a:pPr algn="ctr">
-              <a:lnSpc>
-                <a:spcPct val="112000"/>
-              </a:lnSpc>
-            </a:pPr>
-            <a:r>
-              <a:rPr sz="900" b="0" i="0">
+            <a:pPr algn="l">
+              <a:lnSpc>
+                <a:spcPct val="112000"/>
+              </a:lnSpc>
+            </a:pPr>
+            <a:r>
+              <a:rPr sz="850" b="0" i="0">
                 <a:solidFill>
                   <a:srgbClr val="404040"/>
                 </a:solidFill>
                 <a:latin typeface="맑은 고딕"/>
                 <a:ea typeface="맑은 고딕"/>
               </a:rPr>
-              <a:t>전문성·Potential
-(연구·기술)</a:t>
-            </a:r>
-          </a:p>
-        </p:txBody>
-      </p:sp>
-      <p:sp>
-        <p:nvSpPr>
-          <p:cNvPr id="12" name="TextBox 11"/>
-          <p:cNvSpPr txBox="1"/>
-          <p:nvPr/>
-        </p:nvSpPr>
-        <p:spPr>
-          <a:xfrm>
-            <a:off x="6954012" y="2423160"/>
-            <a:ext cx="182880" cy="274320"/>
-          </a:xfrm>
-          <a:prstGeom prst="rect">
-            <a:avLst/>
-          </a:prstGeom>
-          <a:noFill/>
-          <a:ln>
-            <a:noFill/>
-          </a:ln>
-        </p:spPr>
-        <p:txBody>
-          <a:bodyPr wrap="square" lIns="27432" rIns="27432" tIns="18288" bIns="18288">
-            <a:spAutoFit/>
-          </a:bodyPr>
-          <a:lstStyle/>
-          <a:p>
-            <a:pPr algn="ctr">
-              <a:lnSpc>
-                <a:spcPct val="112000"/>
-              </a:lnSpc>
-            </a:pPr>
-            <a:r>
-              <a:rPr sz="1300" b="0" i="0">
-                <a:solidFill>
-                  <a:srgbClr val="919191"/>
-                </a:solidFill>
-                <a:latin typeface="맑은 고딕"/>
-                <a:ea typeface="맑은 고딕"/>
-              </a:rPr>
-              <a:t>→</a:t>
-            </a:r>
-          </a:p>
-        </p:txBody>
-      </p:sp>
-      <p:sp>
-        <p:nvSpPr>
-          <p:cNvPr id="13" name="Rounded Rectangle 12"/>
+              <a:t>B2B 채널별 장기 영업 활동, 성과 가시성 높음</a:t>
+            </a:r>
+          </a:p>
+        </p:txBody>
+      </p:sp>
+      <p:sp>
+        <p:nvSpPr>
+          <p:cNvPr id="14" name="Rounded Rectangle 13"/>
           <p:cNvSpPr/>
           <p:nvPr/>
         </p:nvSpPr>
         <p:spPr>
           <a:xfrm>
-            <a:off x="7155180" y="2286000"/>
-            <a:ext cx="2011680" cy="548640"/>
+            <a:off x="3849624" y="3246120"/>
+            <a:ext cx="2450592" cy="886968"/>
           </a:xfrm>
           <a:prstGeom prst="roundRect">
             <a:avLst/>
           </a:prstGeom>
-          <a:noFill/>
-          <a:ln>
-            <a:noFill/>
+          <a:solidFill>
+            <a:srgbClr val="D9D9D9"/>
+          </a:solidFill>
+          <a:ln w="6350">
+            <a:solidFill>
+              <a:schemeClr val="dk1"/>
+            </a:solidFill>
           </a:ln>
         </p:spPr>
         <p:style>
@@ -16272,28 +16706,28 @@
               </a:lnSpc>
             </a:pPr>
             <a:r>
-              <a:rPr sz="1100" b="1" i="0">
-                <a:solidFill>
-                  <a:srgbClr val="FFFFFF"/>
-                </a:solidFill>
-                <a:latin typeface="맑은 고딕"/>
-                <a:ea typeface="맑은 고딕"/>
-              </a:rPr>
-              <a:t>직군 적용</a:t>
-            </a:r>
-          </a:p>
-        </p:txBody>
-      </p:sp>
-      <p:sp>
-        <p:nvSpPr>
-          <p:cNvPr id="14" name="TextBox 13"/>
+              <a:rPr sz="900" b="1" i="0">
+                <a:solidFill>
+                  <a:srgbClr val="921F0B"/>
+                </a:solidFill>
+                <a:latin typeface="맑은 고딕"/>
+                <a:ea typeface="맑은 고딕"/>
+              </a:rPr>
+              <a:t>“목표 달성 기반 개인 성과 인정”</a:t>
+            </a:r>
+          </a:p>
+        </p:txBody>
+      </p:sp>
+      <p:sp>
+        <p:nvSpPr>
+          <p:cNvPr id="15" name="TextBox 14"/>
           <p:cNvSpPr txBox="1"/>
           <p:nvPr/>
         </p:nvSpPr>
         <p:spPr>
           <a:xfrm>
-            <a:off x="7155180" y="2880360"/>
-            <a:ext cx="2011680" cy="731520"/>
+            <a:off x="6391656" y="3520439"/>
+            <a:ext cx="429768" cy="320040"/>
           </a:xfrm>
           <a:prstGeom prst="rect">
             <a:avLst/>
@@ -16315,29 +16749,28 @@
               </a:lnSpc>
             </a:pPr>
             <a:r>
-              <a:rPr sz="900" b="0" i="0">
-                <a:solidFill>
-                  <a:srgbClr val="404040"/>
-                </a:solidFill>
-                <a:latin typeface="맑은 고딕"/>
-                <a:ea typeface="맑은 고딕"/>
-              </a:rPr>
-              <a:t>직군/직렬별
-평가 틀 매핑</a:t>
-            </a:r>
-          </a:p>
-        </p:txBody>
-      </p:sp>
-      <p:sp>
-        <p:nvSpPr>
-          <p:cNvPr id="15" name="TextBox 14"/>
+              <a:rPr sz="1200" b="0" i="0">
+                <a:solidFill>
+                  <a:srgbClr val="919191"/>
+                </a:solidFill>
+                <a:latin typeface="맑은 고딕"/>
+                <a:ea typeface="맑은 고딕"/>
+              </a:rPr>
+              <a:t>▶</a:t>
+            </a:r>
+          </a:p>
+        </p:txBody>
+      </p:sp>
+      <p:sp>
+        <p:nvSpPr>
+          <p:cNvPr id="16" name="TextBox 15"/>
           <p:cNvSpPr txBox="1"/>
           <p:nvPr/>
         </p:nvSpPr>
         <p:spPr>
           <a:xfrm>
-            <a:off x="337413" y="3749039"/>
-            <a:ext cx="1143000" cy="347472"/>
+            <a:off x="6922008" y="3246120"/>
+            <a:ext cx="2368296" cy="886968"/>
           </a:xfrm>
           <a:prstGeom prst="rect">
             <a:avLst/>
@@ -16353,43 +16786,43 @@
           </a:bodyPr>
           <a:lstStyle/>
           <a:p>
-            <a:pPr algn="r">
-              <a:lnSpc>
-                <a:spcPct val="112000"/>
-              </a:lnSpc>
-            </a:pPr>
-            <a:r>
-              <a:rPr sz="1100" b="0" i="1">
-                <a:solidFill>
-                  <a:srgbClr val="919191"/>
-                </a:solidFill>
-                <a:latin typeface="맑은 고딕"/>
-                <a:ea typeface="맑은 고딕"/>
-              </a:rPr>
-              <a:t>도출 방식</a:t>
-            </a:r>
-          </a:p>
-        </p:txBody>
-      </p:sp>
-      <p:sp>
-        <p:nvSpPr>
-          <p:cNvPr id="16" name="Rounded Rectangle 15"/>
+            <a:pPr algn="l">
+              <a:lnSpc>
+                <a:spcPct val="112000"/>
+              </a:lnSpc>
+            </a:pPr>
+            <a:r>
+              <a:rPr sz="850" b="0" i="0">
+                <a:solidFill>
+                  <a:srgbClr val="404040"/>
+                </a:solidFill>
+                <a:latin typeface="맑은 고딕"/>
+                <a:ea typeface="맑은 고딕"/>
+              </a:rPr>
+              <a:t>채널 난이도 가중치 반영, 개인 성과/보상 연계</a:t>
+            </a:r>
+          </a:p>
+        </p:txBody>
+      </p:sp>
+      <p:sp>
+        <p:nvSpPr>
+          <p:cNvPr id="17" name="Rounded Rectangle 16"/>
           <p:cNvSpPr/>
           <p:nvPr/>
         </p:nvSpPr>
         <p:spPr>
           <a:xfrm>
-            <a:off x="1678838" y="3749039"/>
-            <a:ext cx="8009229" cy="365760"/>
+            <a:off x="630936" y="4233672"/>
+            <a:ext cx="1143000" cy="886968"/>
           </a:xfrm>
           <a:prstGeom prst="roundRect">
             <a:avLst/>
           </a:prstGeom>
-          <a:noFill/>
-          <a:ln w="6350">
-            <a:solidFill>
-              <a:schemeClr val="dk1"/>
-            </a:solidFill>
+          <a:solidFill>
+            <a:srgbClr val="921F0B"/>
+          </a:solidFill>
+          <a:ln>
+            <a:noFill/>
           </a:ln>
         </p:spPr>
         <p:style>
@@ -16410,34 +16843,34 @@
           <a:bodyPr rtlCol="0" anchor="ctr" wrap="square" lIns="64008" rIns="36576" tIns="18288" bIns="18288"/>
           <a:lstStyle/>
           <a:p>
-            <a:pPr algn="l">
-              <a:lnSpc>
-                <a:spcPct val="112000"/>
-              </a:lnSpc>
-            </a:pPr>
-            <a:r>
-              <a:rPr sz="1000" b="0" i="0">
-                <a:solidFill>
-                  <a:srgbClr val="404040"/>
-                </a:solidFill>
-                <a:latin typeface="맑은 고딕"/>
-                <a:ea typeface="맑은 고딕"/>
-              </a:rPr>
-              <a:t>직무 확정 후 일의 특성을 분석해 평가 유형 분류</a:t>
-            </a:r>
-          </a:p>
-        </p:txBody>
-      </p:sp>
-      <p:sp>
-        <p:nvSpPr>
-          <p:cNvPr id="17" name="TextBox 16"/>
+            <a:pPr algn="ctr">
+              <a:lnSpc>
+                <a:spcPct val="112000"/>
+              </a:lnSpc>
+            </a:pPr>
+            <a:r>
+              <a:rPr sz="1000" b="1" i="0">
+                <a:solidFill>
+                  <a:srgbClr val="FFFFFF"/>
+                </a:solidFill>
+                <a:latin typeface="맑은 고딕"/>
+                <a:ea typeface="맑은 고딕"/>
+              </a:rPr>
+              <a:t>생산</a:t>
+            </a:r>
+          </a:p>
+        </p:txBody>
+      </p:sp>
+      <p:sp>
+        <p:nvSpPr>
+          <p:cNvPr id="18" name="TextBox 17"/>
           <p:cNvSpPr txBox="1"/>
           <p:nvPr/>
         </p:nvSpPr>
         <p:spPr>
           <a:xfrm>
-            <a:off x="337413" y="4169663"/>
-            <a:ext cx="1143000" cy="347472"/>
+            <a:off x="1828800" y="4233672"/>
+            <a:ext cx="1892807" cy="886968"/>
           </a:xfrm>
           <a:prstGeom prst="rect">
             <a:avLst/>
@@ -16453,39 +16886,41 @@
           </a:bodyPr>
           <a:lstStyle/>
           <a:p>
-            <a:pPr algn="r">
-              <a:lnSpc>
-                <a:spcPct val="112000"/>
-              </a:lnSpc>
-            </a:pPr>
-            <a:r>
-              <a:rPr sz="1100" b="0" i="1">
-                <a:solidFill>
-                  <a:srgbClr val="919191"/>
-                </a:solidFill>
-                <a:latin typeface="맑은 고딕"/>
-                <a:ea typeface="맑은 고딕"/>
-              </a:rPr>
-              <a:t>협의</a:t>
-            </a:r>
-          </a:p>
-        </p:txBody>
-      </p:sp>
-      <p:sp>
-        <p:nvSpPr>
-          <p:cNvPr id="18" name="Rounded Rectangle 17"/>
+            <a:pPr algn="l">
+              <a:lnSpc>
+                <a:spcPct val="112000"/>
+              </a:lnSpc>
+            </a:pPr>
+            <a:r>
+              <a:rPr sz="850" b="0" i="0">
+                <a:solidFill>
+                  <a:srgbClr val="404040"/>
+                </a:solidFill>
+                <a:latin typeface="맑은 고딕"/>
+                <a:ea typeface="맑은 고딕"/>
+              </a:rPr>
+              <a:t>수율·설비·원가 등 반복·절대적 수행 업무</a:t>
+            </a:r>
+          </a:p>
+        </p:txBody>
+      </p:sp>
+      <p:sp>
+        <p:nvSpPr>
+          <p:cNvPr id="19" name="Rounded Rectangle 18"/>
           <p:cNvSpPr/>
           <p:nvPr/>
         </p:nvSpPr>
         <p:spPr>
           <a:xfrm>
-            <a:off x="1678838" y="4169663"/>
-            <a:ext cx="8009229" cy="365760"/>
+            <a:off x="3849624" y="4233672"/>
+            <a:ext cx="2450592" cy="886968"/>
           </a:xfrm>
           <a:prstGeom prst="roundRect">
             <a:avLst/>
           </a:prstGeom>
-          <a:noFill/>
+          <a:solidFill>
+            <a:srgbClr val="D9D9D9"/>
+          </a:solidFill>
           <a:ln w="6350">
             <a:solidFill>
               <a:schemeClr val="dk1"/>
@@ -16510,20 +16945,451 @@
           <a:bodyPr rtlCol="0" anchor="ctr" wrap="square" lIns="64008" rIns="36576" tIns="18288" bIns="18288"/>
           <a:lstStyle/>
           <a:p>
+            <a:pPr algn="ctr">
+              <a:lnSpc>
+                <a:spcPct val="112000"/>
+              </a:lnSpc>
+            </a:pPr>
+            <a:r>
+              <a:rPr sz="900" b="1" i="0">
+                <a:solidFill>
+                  <a:srgbClr val="921F0B"/>
+                </a:solidFill>
+                <a:latin typeface="맑은 고딕"/>
+                <a:ea typeface="맑은 고딕"/>
+              </a:rPr>
+              <a:t>“조직 단위 성과·절대 수준 관리”</a:t>
+            </a:r>
+          </a:p>
+        </p:txBody>
+      </p:sp>
+      <p:sp>
+        <p:nvSpPr>
+          <p:cNvPr id="20" name="TextBox 19"/>
+          <p:cNvSpPr txBox="1"/>
+          <p:nvPr/>
+        </p:nvSpPr>
+        <p:spPr>
+          <a:xfrm>
+            <a:off x="6391656" y="4507992"/>
+            <a:ext cx="429768" cy="320040"/>
+          </a:xfrm>
+          <a:prstGeom prst="rect">
+            <a:avLst/>
+          </a:prstGeom>
+          <a:noFill/>
+          <a:ln>
+            <a:noFill/>
+          </a:ln>
+        </p:spPr>
+        <p:txBody>
+          <a:bodyPr wrap="square" lIns="27432" rIns="27432" tIns="18288" bIns="18288">
+            <a:spAutoFit/>
+          </a:bodyPr>
+          <a:lstStyle/>
+          <a:p>
+            <a:pPr algn="ctr">
+              <a:lnSpc>
+                <a:spcPct val="112000"/>
+              </a:lnSpc>
+            </a:pPr>
+            <a:r>
+              <a:rPr sz="1200" b="0" i="0">
+                <a:solidFill>
+                  <a:srgbClr val="919191"/>
+                </a:solidFill>
+                <a:latin typeface="맑은 고딕"/>
+                <a:ea typeface="맑은 고딕"/>
+              </a:rPr>
+              <a:t>▶</a:t>
+            </a:r>
+          </a:p>
+        </p:txBody>
+      </p:sp>
+      <p:sp>
+        <p:nvSpPr>
+          <p:cNvPr id="21" name="TextBox 20"/>
+          <p:cNvSpPr txBox="1"/>
+          <p:nvPr/>
+        </p:nvSpPr>
+        <p:spPr>
+          <a:xfrm>
+            <a:off x="6922008" y="4233672"/>
+            <a:ext cx="2368296" cy="886968"/>
+          </a:xfrm>
+          <a:prstGeom prst="rect">
+            <a:avLst/>
+          </a:prstGeom>
+          <a:noFill/>
+          <a:ln>
+            <a:noFill/>
+          </a:ln>
+        </p:spPr>
+        <p:txBody>
+          <a:bodyPr wrap="square" lIns="27432" rIns="27432" tIns="18288" bIns="18288">
+            <a:spAutoFit/>
+          </a:bodyPr>
+          <a:lstStyle/>
+          <a:p>
             <a:pPr algn="l">
               <a:lnSpc>
                 <a:spcPct val="112000"/>
               </a:lnSpc>
             </a:pPr>
             <a:r>
-              <a:rPr sz="1000" b="0" i="0">
+              <a:rPr sz="850" b="0" i="0">
                 <a:solidFill>
                   <a:srgbClr val="404040"/>
                 </a:solidFill>
                 <a:latin typeface="맑은 고딕"/>
                 <a:ea typeface="맑은 고딕"/>
               </a:rPr>
-              <a:t>TFT 협의로 직군별 적합 평가제도 수립</a:t>
+              <a:t>절대평가 고려, 조직 성과 연계 보상</a:t>
+            </a:r>
+          </a:p>
+        </p:txBody>
+      </p:sp>
+      <p:sp>
+        <p:nvSpPr>
+          <p:cNvPr id="22" name="Rounded Rectangle 21"/>
+          <p:cNvSpPr/>
+          <p:nvPr/>
+        </p:nvSpPr>
+        <p:spPr>
+          <a:xfrm>
+            <a:off x="630936" y="5248656"/>
+            <a:ext cx="1143000" cy="886968"/>
+          </a:xfrm>
+          <a:prstGeom prst="roundRect">
+            <a:avLst/>
+          </a:prstGeom>
+          <a:solidFill>
+            <a:srgbClr val="921F0B"/>
+          </a:solidFill>
+          <a:ln>
+            <a:noFill/>
+          </a:ln>
+        </p:spPr>
+        <p:style>
+          <a:lnRef idx="1">
+            <a:schemeClr val="accent1"/>
+          </a:lnRef>
+          <a:fillRef idx="3">
+            <a:schemeClr val="accent1"/>
+          </a:fillRef>
+          <a:effectRef idx="2">
+            <a:schemeClr val="accent1"/>
+          </a:effectRef>
+          <a:fontRef idx="minor">
+            <a:schemeClr val="lt1"/>
+          </a:fontRef>
+        </p:style>
+        <p:txBody>
+          <a:bodyPr rtlCol="0" anchor="ctr" wrap="square" lIns="64008" rIns="36576" tIns="18288" bIns="18288"/>
+          <a:lstStyle/>
+          <a:p>
+            <a:pPr algn="ctr">
+              <a:lnSpc>
+                <a:spcPct val="112000"/>
+              </a:lnSpc>
+            </a:pPr>
+            <a:r>
+              <a:rPr sz="1000" b="1" i="0">
+                <a:solidFill>
+                  <a:srgbClr val="FFFFFF"/>
+                </a:solidFill>
+                <a:latin typeface="맑은 고딕"/>
+                <a:ea typeface="맑은 고딕"/>
+              </a:rPr>
+              <a:t>경영지원</a:t>
+            </a:r>
+          </a:p>
+        </p:txBody>
+      </p:sp>
+      <p:sp>
+        <p:nvSpPr>
+          <p:cNvPr id="23" name="TextBox 22"/>
+          <p:cNvSpPr txBox="1"/>
+          <p:nvPr/>
+        </p:nvSpPr>
+        <p:spPr>
+          <a:xfrm>
+            <a:off x="1828800" y="5248656"/>
+            <a:ext cx="1892807" cy="886968"/>
+          </a:xfrm>
+          <a:prstGeom prst="rect">
+            <a:avLst/>
+          </a:prstGeom>
+          <a:noFill/>
+          <a:ln>
+            <a:noFill/>
+          </a:ln>
+        </p:spPr>
+        <p:txBody>
+          <a:bodyPr wrap="square" lIns="27432" rIns="27432" tIns="18288" bIns="18288">
+            <a:spAutoFit/>
+          </a:bodyPr>
+          <a:lstStyle/>
+          <a:p>
+            <a:pPr algn="l">
+              <a:lnSpc>
+                <a:spcPct val="112000"/>
+              </a:lnSpc>
+            </a:pPr>
+            <a:r>
+              <a:rPr sz="850" b="0" i="0">
+                <a:solidFill>
+                  <a:srgbClr val="404040"/>
+                </a:solidFill>
+                <a:latin typeface="맑은 고딕"/>
+                <a:ea typeface="맑은 고딕"/>
+              </a:rPr>
+              <a:t>전사 과제·글로벌 법인 지원, 가시성 낮음</a:t>
+            </a:r>
+          </a:p>
+        </p:txBody>
+      </p:sp>
+      <p:sp>
+        <p:nvSpPr>
+          <p:cNvPr id="24" name="Rounded Rectangle 23"/>
+          <p:cNvSpPr/>
+          <p:nvPr/>
+        </p:nvSpPr>
+        <p:spPr>
+          <a:xfrm>
+            <a:off x="3849624" y="5248656"/>
+            <a:ext cx="2450592" cy="886968"/>
+          </a:xfrm>
+          <a:prstGeom prst="roundRect">
+            <a:avLst/>
+          </a:prstGeom>
+          <a:solidFill>
+            <a:srgbClr val="D9D9D9"/>
+          </a:solidFill>
+          <a:ln w="6350">
+            <a:solidFill>
+              <a:schemeClr val="dk1"/>
+            </a:solidFill>
+          </a:ln>
+        </p:spPr>
+        <p:style>
+          <a:lnRef idx="1">
+            <a:schemeClr val="accent1"/>
+          </a:lnRef>
+          <a:fillRef idx="3">
+            <a:schemeClr val="accent1"/>
+          </a:fillRef>
+          <a:effectRef idx="2">
+            <a:schemeClr val="accent1"/>
+          </a:effectRef>
+          <a:fontRef idx="minor">
+            <a:schemeClr val="lt1"/>
+          </a:fontRef>
+        </p:style>
+        <p:txBody>
+          <a:bodyPr rtlCol="0" anchor="ctr" wrap="square" lIns="64008" rIns="36576" tIns="18288" bIns="18288"/>
+          <a:lstStyle/>
+          <a:p>
+            <a:pPr algn="ctr">
+              <a:lnSpc>
+                <a:spcPct val="112000"/>
+              </a:lnSpc>
+            </a:pPr>
+            <a:r>
+              <a:rPr sz="900" b="1" i="0">
+                <a:solidFill>
+                  <a:srgbClr val="921F0B"/>
+                </a:solidFill>
+                <a:latin typeface="맑은 고딕"/>
+                <a:ea typeface="맑은 고딕"/>
+              </a:rPr>
+              <a:t>“핵심 과제 중심 상시관리·협업”</a:t>
+            </a:r>
+          </a:p>
+        </p:txBody>
+      </p:sp>
+      <p:sp>
+        <p:nvSpPr>
+          <p:cNvPr id="25" name="TextBox 24"/>
+          <p:cNvSpPr txBox="1"/>
+          <p:nvPr/>
+        </p:nvSpPr>
+        <p:spPr>
+          <a:xfrm>
+            <a:off x="6391656" y="5522976"/>
+            <a:ext cx="429768" cy="320040"/>
+          </a:xfrm>
+          <a:prstGeom prst="rect">
+            <a:avLst/>
+          </a:prstGeom>
+          <a:noFill/>
+          <a:ln>
+            <a:noFill/>
+          </a:ln>
+        </p:spPr>
+        <p:txBody>
+          <a:bodyPr wrap="square" lIns="27432" rIns="27432" tIns="18288" bIns="18288">
+            <a:spAutoFit/>
+          </a:bodyPr>
+          <a:lstStyle/>
+          <a:p>
+            <a:pPr algn="ctr">
+              <a:lnSpc>
+                <a:spcPct val="112000"/>
+              </a:lnSpc>
+            </a:pPr>
+            <a:r>
+              <a:rPr sz="1200" b="0" i="0">
+                <a:solidFill>
+                  <a:srgbClr val="919191"/>
+                </a:solidFill>
+                <a:latin typeface="맑은 고딕"/>
+                <a:ea typeface="맑은 고딕"/>
+              </a:rPr>
+              <a:t>▶</a:t>
+            </a:r>
+          </a:p>
+        </p:txBody>
+      </p:sp>
+      <p:sp>
+        <p:nvSpPr>
+          <p:cNvPr id="26" name="TextBox 25"/>
+          <p:cNvSpPr txBox="1"/>
+          <p:nvPr/>
+        </p:nvSpPr>
+        <p:spPr>
+          <a:xfrm>
+            <a:off x="6922008" y="5248656"/>
+            <a:ext cx="2368296" cy="886968"/>
+          </a:xfrm>
+          <a:prstGeom prst="rect">
+            <a:avLst/>
+          </a:prstGeom>
+          <a:noFill/>
+          <a:ln>
+            <a:noFill/>
+          </a:ln>
+        </p:spPr>
+        <p:txBody>
+          <a:bodyPr wrap="square" lIns="27432" rIns="27432" tIns="18288" bIns="18288">
+            <a:spAutoFit/>
+          </a:bodyPr>
+          <a:lstStyle/>
+          <a:p>
+            <a:pPr algn="l">
+              <a:lnSpc>
+                <a:spcPct val="112000"/>
+              </a:lnSpc>
+            </a:pPr>
+            <a:r>
+              <a:rPr sz="850" b="0" i="0">
+                <a:solidFill>
+                  <a:srgbClr val="404040"/>
+                </a:solidFill>
+                <a:latin typeface="맑은 고딕"/>
+                <a:ea typeface="맑은 고딕"/>
+              </a:rPr>
+              <a:t>핵심과제 목표설정, 협업 지표 반영</a:t>
+            </a:r>
+          </a:p>
+        </p:txBody>
+      </p:sp>
+      <p:sp>
+        <p:nvSpPr>
+          <p:cNvPr id="27" name="TextBox 26"/>
+          <p:cNvSpPr txBox="1"/>
+          <p:nvPr/>
+        </p:nvSpPr>
+        <p:spPr>
+          <a:xfrm>
+            <a:off x="630936" y="6236208"/>
+            <a:ext cx="8641080" cy="274320"/>
+          </a:xfrm>
+          <a:prstGeom prst="rect">
+            <a:avLst/>
+          </a:prstGeom>
+          <a:noFill/>
+          <a:ln>
+            <a:noFill/>
+          </a:ln>
+        </p:spPr>
+        <p:txBody>
+          <a:bodyPr wrap="square" lIns="27432" rIns="27432" tIns="18288" bIns="18288">
+            <a:spAutoFit/>
+          </a:bodyPr>
+          <a:lstStyle/>
+          <a:p>
+            <a:pPr algn="ctr">
+              <a:lnSpc>
+                <a:spcPct val="112000"/>
+              </a:lnSpc>
+            </a:pPr>
+            <a:r>
+              <a:rPr sz="1100" b="1" i="1">
+                <a:solidFill>
+                  <a:srgbClr val="921F0B"/>
+                </a:solidFill>
+                <a:latin typeface="맑은 고딕"/>
+                <a:ea typeface="맑은 고딕"/>
+              </a:rPr>
+              <a:t>“각 직군별 업무 특성을 반영한 평가제도 마련으로 인력 관리의 효과성 제고”</a:t>
+            </a:r>
+          </a:p>
+        </p:txBody>
+      </p:sp>
+      <p:sp>
+        <p:nvSpPr>
+          <p:cNvPr id="28" name="Rounded Rectangle 27"/>
+          <p:cNvSpPr/>
+          <p:nvPr/>
+        </p:nvSpPr>
+        <p:spPr>
+          <a:xfrm>
+            <a:off x="8741664" y="1472184"/>
+            <a:ext cx="530352" cy="246888"/>
+          </a:xfrm>
+          <a:prstGeom prst="roundRect">
+            <a:avLst/>
+          </a:prstGeom>
+          <a:solidFill>
+            <a:srgbClr val="D9D9D9"/>
+          </a:solidFill>
+          <a:ln>
+            <a:noFill/>
+          </a:ln>
+        </p:spPr>
+        <p:style>
+          <a:lnRef idx="1">
+            <a:schemeClr val="accent1"/>
+          </a:lnRef>
+          <a:fillRef idx="3">
+            <a:schemeClr val="accent1"/>
+          </a:fillRef>
+          <a:effectRef idx="2">
+            <a:schemeClr val="accent1"/>
+          </a:effectRef>
+          <a:fontRef idx="minor">
+            <a:schemeClr val="lt1"/>
+          </a:fontRef>
+        </p:style>
+        <p:txBody>
+          <a:bodyPr rtlCol="0" anchor="ctr" wrap="square" lIns="64008" rIns="36576" tIns="18288" bIns="18288"/>
+          <a:lstStyle/>
+          <a:p>
+            <a:pPr algn="ctr">
+              <a:lnSpc>
+                <a:spcPct val="112000"/>
+              </a:lnSpc>
+            </a:pPr>
+            <a:r>
+              <a:rPr sz="800" b="0" i="0">
+                <a:solidFill>
+                  <a:srgbClr val="404040"/>
+                </a:solidFill>
+                <a:latin typeface="맑은 고딕"/>
+                <a:ea typeface="맑은 고딕"/>
+              </a:rPr>
+              <a:t>예시적</a:t>
             </a:r>
           </a:p>
         </p:txBody>
@@ -16602,7 +17468,9 @@
           <a:prstGeom prst="roundRect">
             <a:avLst/>
           </a:prstGeom>
-          <a:noFill/>
+          <a:solidFill>
+            <a:srgbClr val="921F0B"/>
+          </a:solidFill>
           <a:ln>
             <a:noFill/>
           </a:ln>
@@ -16745,7 +17613,9 @@
           <a:prstGeom prst="roundRect">
             <a:avLst/>
           </a:prstGeom>
-          <a:noFill/>
+          <a:solidFill>
+            <a:srgbClr val="921F0B"/>
+          </a:solidFill>
           <a:ln>
             <a:noFill/>
           </a:ln>
@@ -16888,7 +17758,9 @@
           <a:prstGeom prst="roundRect">
             <a:avLst/>
           </a:prstGeom>
-          <a:noFill/>
+          <a:solidFill>
+            <a:srgbClr val="921F0B"/>
+          </a:solidFill>
           <a:ln>
             <a:noFill/>
           </a:ln>
@@ -17031,7 +17903,9 @@
           <a:prstGeom prst="roundRect">
             <a:avLst/>
           </a:prstGeom>
-          <a:noFill/>
+          <a:solidFill>
+            <a:srgbClr val="921F0B"/>
+          </a:solidFill>
           <a:ln>
             <a:noFill/>
           </a:ln>
@@ -17651,7 +18525,9 @@
           <a:prstGeom prst="roundRect">
             <a:avLst/>
           </a:prstGeom>
-          <a:noFill/>
+          <a:solidFill>
+            <a:srgbClr val="921F0B"/>
+          </a:solidFill>
           <a:ln>
             <a:noFill/>
           </a:ln>
@@ -17794,7 +18670,9 @@
           <a:prstGeom prst="roundRect">
             <a:avLst/>
           </a:prstGeom>
-          <a:noFill/>
+          <a:solidFill>
+            <a:srgbClr val="921F0B"/>
+          </a:solidFill>
           <a:ln>
             <a:noFill/>
           </a:ln>
@@ -17937,7 +18815,9 @@
           <a:prstGeom prst="roundRect">
             <a:avLst/>
           </a:prstGeom>
-          <a:noFill/>
+          <a:solidFill>
+            <a:srgbClr val="921F0B"/>
+          </a:solidFill>
           <a:ln>
             <a:noFill/>
           </a:ln>
@@ -18080,7 +18960,9 @@
           <a:prstGeom prst="roundRect">
             <a:avLst/>
           </a:prstGeom>
-          <a:noFill/>
+          <a:solidFill>
+            <a:srgbClr val="921F0B"/>
+          </a:solidFill>
           <a:ln>
             <a:noFill/>
           </a:ln>
@@ -18240,7 +19122,9 @@
           <a:prstGeom prst="roundRect">
             <a:avLst/>
           </a:prstGeom>
-          <a:noFill/>
+          <a:solidFill>
+            <a:srgbClr val="921F0B"/>
+          </a:solidFill>
           <a:ln>
             <a:noFill/>
           </a:ln>
@@ -18295,7 +19179,9 @@
           <a:prstGeom prst="roundRect">
             <a:avLst/>
           </a:prstGeom>
-          <a:noFill/>
+          <a:solidFill>
+            <a:srgbClr val="404040"/>
+          </a:solidFill>
           <a:ln>
             <a:noFill/>
           </a:ln>
@@ -18826,7 +19712,7 @@
           <a:lstStyle/>
           <a:p>
             <a:r>
-              <a:t>직무기반 보상제도 설계</a:t>
+              <a:t>보상제도 개선  4P 기반 보상체계 설계</a:t>
             </a:r>
           </a:p>
         </p:txBody>
@@ -18847,7 +19733,7 @@
           <a:lstStyle/>
           <a:p>
             <a:r>
-              <a:t>Pay Policy → Pay Mix → Pay Level → 평가 연계의 순차적 보상 개선 프로세스</a:t>
+              <a:t>Pay Policy → Pay Level → Pay Structure → Pay Mix의 4P 관점으로 직무가치·직군 특성을 반영</a:t>
             </a:r>
           </a:p>
         </p:txBody>
@@ -18990,7 +19876,7 @@
                 <a:latin typeface="맑은 고딕"/>
                 <a:ea typeface="맑은 고딕"/>
               </a:rPr>
-              <a:t>Pay Mix</a:t>
+              <a:t>Pay Level</a:t>
             </a:r>
           </a:p>
         </p:txBody>
@@ -19047,7 +19933,7 @@
                 <a:latin typeface="맑은 고딕"/>
                 <a:ea typeface="맑은 고딕"/>
               </a:rPr>
-              <a:t>사무직·생산직 등 직군별 기본급/변동급 구성 설계</a:t>
+              <a:t>충원 필요 직군 중심 시장 BM으로 외부 경쟁력(수준) 확보</a:t>
             </a:r>
           </a:p>
         </p:txBody>
@@ -19090,7 +19976,7 @@
                 <a:latin typeface="맑은 고딕"/>
                 <a:ea typeface="맑은 고딕"/>
               </a:rPr>
-              <a:t>Pay Level</a:t>
+              <a:t>Pay Structure</a:t>
             </a:r>
           </a:p>
         </p:txBody>
@@ -19147,7 +20033,7 @@
                 <a:latin typeface="맑은 고딕"/>
                 <a:ea typeface="맑은 고딕"/>
               </a:rPr>
-              <a:t>충원 필요 직군 중심 시장 BM으로 외부 경쟁력 확보</a:t>
+              <a:t>직무가치 기반 급여 대역(Pay Band)·등급 구조 설계 + 평가-보상 Contributor Connection</a:t>
             </a:r>
           </a:p>
         </p:txBody>
@@ -19190,7 +20076,7 @@
                 <a:latin typeface="맑은 고딕"/>
                 <a:ea typeface="맑은 고딕"/>
               </a:rPr>
-              <a:t>평가 연계</a:t>
+              <a:t>Pay Mix</a:t>
             </a:r>
           </a:p>
         </p:txBody>
@@ -19247,7 +20133,7 @@
                 <a:latin typeface="맑은 고딕"/>
                 <a:ea typeface="맑은 고딕"/>
               </a:rPr>
-              <a:t>평가 결과를 기본급/변동급에 연동 (Contributor Connection)</a:t>
+              <a:t>사무직·생산직 등 직군별 기본급/변동급 조합(Mix) 차별화</a:t>
             </a:r>
           </a:p>
         </p:txBody>
@@ -20809,7 +21695,9 @@
           <a:prstGeom prst="roundRect">
             <a:avLst/>
           </a:prstGeom>
-          <a:noFill/>
+          <a:solidFill>
+            <a:srgbClr val="921F0B"/>
+          </a:solidFill>
           <a:ln>
             <a:noFill/>
           </a:ln>
@@ -20952,7 +21840,9 @@
           <a:prstGeom prst="roundRect">
             <a:avLst/>
           </a:prstGeom>
-          <a:noFill/>
+          <a:solidFill>
+            <a:srgbClr val="921F0B"/>
+          </a:solidFill>
           <a:ln>
             <a:noFill/>
           </a:ln>
@@ -21095,7 +21985,9 @@
           <a:prstGeom prst="roundRect">
             <a:avLst/>
           </a:prstGeom>
-          <a:noFill/>
+          <a:solidFill>
+            <a:srgbClr val="921F0B"/>
+          </a:solidFill>
           <a:ln>
             <a:noFill/>
           </a:ln>
@@ -21238,7 +22130,9 @@
           <a:prstGeom prst="roundRect">
             <a:avLst/>
           </a:prstGeom>
-          <a:noFill/>
+          <a:solidFill>
+            <a:srgbClr val="921F0B"/>
+          </a:solidFill>
           <a:ln>
             <a:noFill/>
           </a:ln>
@@ -21381,7 +22275,9 @@
           <a:prstGeom prst="roundRect">
             <a:avLst/>
           </a:prstGeom>
-          <a:noFill/>
+          <a:solidFill>
+            <a:srgbClr val="921F0B"/>
+          </a:solidFill>
           <a:ln>
             <a:noFill/>
           </a:ln>
@@ -21541,7 +22437,9 @@
           <a:prstGeom prst="roundRect">
             <a:avLst/>
           </a:prstGeom>
-          <a:noFill/>
+          <a:solidFill>
+            <a:srgbClr val="921F0B"/>
+          </a:solidFill>
           <a:ln>
             <a:noFill/>
           </a:ln>
@@ -21596,7 +22494,9 @@
           <a:prstGeom prst="roundRect">
             <a:avLst/>
           </a:prstGeom>
-          <a:noFill/>
+          <a:solidFill>
+            <a:srgbClr val="404040"/>
+          </a:solidFill>
           <a:ln>
             <a:noFill/>
           </a:ln>
@@ -23287,7 +24187,9 @@
           <a:prstGeom prst="roundRect">
             <a:avLst/>
           </a:prstGeom>
-          <a:noFill/>
+          <a:solidFill>
+            <a:srgbClr val="921F0B"/>
+          </a:solidFill>
           <a:ln>
             <a:noFill/>
           </a:ln>
@@ -23342,7 +24244,9 @@
           <a:prstGeom prst="roundRect">
             <a:avLst/>
           </a:prstGeom>
-          <a:noFill/>
+          <a:solidFill>
+            <a:srgbClr val="404040"/>
+          </a:solidFill>
           <a:ln>
             <a:noFill/>
           </a:ln>
@@ -25292,7 +26196,7 @@
           <a:lstStyle/>
           <a:p>
             <a:r>
-              <a:t>직무체계·평가/보상 미흡에 따른 인사 개편이 필요하나, 전통적 컨설팅은 자원·기간 과다</a:t>
+              <a:t>직무체계·평가/보상제도 미흡에 따른 인사제도 개편이 필요하나, 전통적 컨설팅은 많은 자원이 장기간 투입되어 효율적 정비가 어려움</a:t>
             </a:r>
           </a:p>
         </p:txBody>
@@ -25305,13 +26209,15 @@
         </p:nvSpPr>
         <p:spPr>
           <a:xfrm>
-            <a:off x="631850" y="1468526"/>
+            <a:off x="631850" y="1472184"/>
             <a:ext cx="4140403" cy="304495"/>
           </a:xfrm>
           <a:prstGeom prst="roundRect">
             <a:avLst/>
           </a:prstGeom>
-          <a:noFill/>
+          <a:solidFill>
+            <a:srgbClr val="919191"/>
+          </a:solidFill>
           <a:ln>
             <a:noFill/>
           </a:ln>
@@ -25334,7 +26240,7 @@
           <a:bodyPr rtlCol="0" anchor="ctr" wrap="square" lIns="64008" rIns="36576" tIns="18288" bIns="18288"/>
           <a:lstStyle/>
           <a:p>
-            <a:pPr algn="ctr">
+            <a:pPr algn="l">
               <a:lnSpc>
                 <a:spcPct val="112000"/>
               </a:lnSpc>
@@ -25347,7 +26253,7 @@
                 <a:latin typeface="맑은 고딕"/>
                 <a:ea typeface="맑은 고딕"/>
               </a:rPr>
-              <a:t>현재 문제점 (As-Is)</a:t>
+              <a:t>고객사의 HR 운영 Issue</a:t>
             </a:r>
           </a:p>
         </p:txBody>
@@ -25360,13 +26266,15 @@
         </p:nvSpPr>
         <p:spPr>
           <a:xfrm>
-            <a:off x="5134356" y="1468526"/>
+            <a:off x="5134356" y="1472184"/>
             <a:ext cx="4140403" cy="304495"/>
           </a:xfrm>
           <a:prstGeom prst="roundRect">
             <a:avLst/>
           </a:prstGeom>
-          <a:noFill/>
+          <a:solidFill>
+            <a:srgbClr val="919191"/>
+          </a:solidFill>
           <a:ln>
             <a:noFill/>
           </a:ln>
@@ -25389,7 +26297,7 @@
           <a:bodyPr rtlCol="0" anchor="ctr" wrap="square" lIns="64008" rIns="36576" tIns="18288" bIns="18288"/>
           <a:lstStyle/>
           <a:p>
-            <a:pPr algn="ctr">
+            <a:pPr algn="l">
               <a:lnSpc>
                 <a:spcPct val="112000"/>
               </a:lnSpc>
@@ -25402,7 +26310,7 @@
                 <a:latin typeface="맑은 고딕"/>
                 <a:ea typeface="맑은 고딕"/>
               </a:rPr>
-              <a:t>기대 개선사항 (To-Be)</a:t>
+              <a:t>전통적 Consulting의 한계</a:t>
             </a:r>
           </a:p>
         </p:txBody>
@@ -25415,8 +26323,8 @@
         </p:nvSpPr>
         <p:spPr>
           <a:xfrm>
-            <a:off x="631850" y="1777593"/>
-            <a:ext cx="4140403" cy="453542"/>
+            <a:off x="1627632" y="1819656"/>
+            <a:ext cx="3145536" cy="457200"/>
           </a:xfrm>
           <a:prstGeom prst="roundRect">
             <a:avLst/>
@@ -25452,14 +26360,14 @@
               </a:lnSpc>
             </a:pPr>
             <a:r>
-              <a:rPr sz="1000" b="0" i="0">
+              <a:rPr sz="900" b="0" i="0">
                 <a:solidFill>
                   <a:srgbClr val="404040"/>
                 </a:solidFill>
                 <a:latin typeface="맑은 고딕"/>
                 <a:ea typeface="맑은 고딕"/>
               </a:rPr>
-              <a:t>표준 직무 부재 — 사업장별 직무 정의·R&amp;R 상이</a:t>
+              <a:t>인력별 업무 / 직무 가치 파악 어려움</a:t>
             </a:r>
           </a:p>
         </p:txBody>
@@ -25472,8 +26380,122 @@
         </p:nvSpPr>
         <p:spPr>
           <a:xfrm>
-            <a:off x="5134356" y="1777593"/>
-            <a:ext cx="4140403" cy="453542"/>
+            <a:off x="631850" y="1819656"/>
+            <a:ext cx="932688" cy="457200"/>
+          </a:xfrm>
+          <a:prstGeom prst="roundRect">
+            <a:avLst/>
+          </a:prstGeom>
+          <a:solidFill>
+            <a:srgbClr val="1D1D1D"/>
+          </a:solidFill>
+          <a:ln>
+            <a:noFill/>
+          </a:ln>
+        </p:spPr>
+        <p:style>
+          <a:lnRef idx="1">
+            <a:schemeClr val="accent1"/>
+          </a:lnRef>
+          <a:fillRef idx="3">
+            <a:schemeClr val="accent1"/>
+          </a:fillRef>
+          <a:effectRef idx="2">
+            <a:schemeClr val="accent1"/>
+          </a:effectRef>
+          <a:fontRef idx="minor">
+            <a:schemeClr val="lt1"/>
+          </a:fontRef>
+        </p:style>
+        <p:txBody>
+          <a:bodyPr rtlCol="0" anchor="ctr" wrap="square" lIns="64008" rIns="36576" tIns="18288" bIns="18288"/>
+          <a:lstStyle/>
+          <a:p>
+            <a:pPr algn="ctr">
+              <a:lnSpc>
+                <a:spcPct val="112000"/>
+              </a:lnSpc>
+            </a:pPr>
+            <a:r>
+              <a:rPr sz="900" b="1" i="0">
+                <a:solidFill>
+                  <a:srgbClr val="FFFFFF"/>
+                </a:solidFill>
+                <a:latin typeface="맑은 고딕"/>
+                <a:ea typeface="맑은 고딕"/>
+              </a:rPr>
+              <a:t>데이터 부재</a:t>
+            </a:r>
+          </a:p>
+        </p:txBody>
+      </p:sp>
+      <p:sp>
+        <p:nvSpPr>
+          <p:cNvPr id="8" name="Rounded Rectangle 7"/>
+          <p:cNvSpPr/>
+          <p:nvPr/>
+        </p:nvSpPr>
+        <p:spPr>
+          <a:xfrm>
+            <a:off x="4345228" y="1865376"/>
+            <a:ext cx="1143000" cy="356616"/>
+          </a:xfrm>
+          <a:prstGeom prst="roundRect">
+            <a:avLst/>
+          </a:prstGeom>
+          <a:solidFill>
+            <a:srgbClr val="919191"/>
+          </a:solidFill>
+          <a:ln>
+            <a:noFill/>
+          </a:ln>
+        </p:spPr>
+        <p:style>
+          <a:lnRef idx="1">
+            <a:schemeClr val="accent1"/>
+          </a:lnRef>
+          <a:fillRef idx="3">
+            <a:schemeClr val="accent1"/>
+          </a:fillRef>
+          <a:effectRef idx="2">
+            <a:schemeClr val="accent1"/>
+          </a:effectRef>
+          <a:fontRef idx="minor">
+            <a:schemeClr val="lt1"/>
+          </a:fontRef>
+        </p:style>
+        <p:txBody>
+          <a:bodyPr rtlCol="0" anchor="ctr" wrap="square" lIns="64008" rIns="36576" tIns="18288" bIns="18288"/>
+          <a:lstStyle/>
+          <a:p>
+            <a:pPr algn="ctr">
+              <a:lnSpc>
+                <a:spcPct val="112000"/>
+              </a:lnSpc>
+            </a:pPr>
+            <a:r>
+              <a:rPr sz="900" b="1" i="0">
+                <a:solidFill>
+                  <a:srgbClr val="FFFFFF"/>
+                </a:solidFill>
+                <a:latin typeface="맑은 고딕"/>
+                <a:ea typeface="맑은 고딕"/>
+              </a:rPr>
+              <a:t>Zero-base</a:t>
+            </a:r>
+          </a:p>
+        </p:txBody>
+      </p:sp>
+      <p:sp>
+        <p:nvSpPr>
+          <p:cNvPr id="9" name="Rounded Rectangle 8"/>
+          <p:cNvSpPr/>
+          <p:nvPr/>
+        </p:nvSpPr>
+        <p:spPr>
+          <a:xfrm>
+            <a:off x="5134356" y="1819656"/>
+            <a:ext cx="4140403" cy="457200"/>
           </a:xfrm>
           <a:prstGeom prst="roundRect">
             <a:avLst/>
@@ -25509,28 +26531,28 @@
               </a:lnSpc>
             </a:pPr>
             <a:r>
-              <a:rPr sz="1000" b="0" i="0">
+              <a:rPr sz="900" b="0" i="0">
                 <a:solidFill>
                   <a:srgbClr val="404040"/>
                 </a:solidFill>
                 <a:latin typeface="맑은 고딕"/>
                 <a:ea typeface="맑은 고딕"/>
               </a:rPr>
-              <a:t>글로벌 표준+AI로 직무분류체계 신속 표준화</a:t>
-            </a:r>
-          </a:p>
-        </p:txBody>
-      </p:sp>
-      <p:sp>
-        <p:nvSpPr>
-          <p:cNvPr id="8" name="Rounded Rectangle 7"/>
+              <a:t>과거 History·현황 파악 등에 많은 시간 / 비용 소요</a:t>
+            </a:r>
+          </a:p>
+        </p:txBody>
+      </p:sp>
+      <p:sp>
+        <p:nvSpPr>
+          <p:cNvPr id="10" name="Rounded Rectangle 9"/>
           <p:cNvSpPr/>
           <p:nvPr/>
         </p:nvSpPr>
         <p:spPr>
           <a:xfrm>
-            <a:off x="631850" y="2316175"/>
-            <a:ext cx="4140403" cy="453542"/>
+            <a:off x="1627632" y="2354580"/>
+            <a:ext cx="3145536" cy="457200"/>
           </a:xfrm>
           <a:prstGeom prst="roundRect">
             <a:avLst/>
@@ -25566,28 +26588,142 @@
               </a:lnSpc>
             </a:pPr>
             <a:r>
-              <a:rPr sz="1000" b="0" i="0">
+              <a:rPr sz="900" b="0" i="0">
                 <a:solidFill>
                   <a:srgbClr val="404040"/>
                 </a:solidFill>
                 <a:latin typeface="맑은 고딕"/>
                 <a:ea typeface="맑은 고딕"/>
               </a:rPr>
-              <a:t>직무 데이터 노후·분산 — 현행화·활용 곤란</a:t>
-            </a:r>
-          </a:p>
-        </p:txBody>
-      </p:sp>
-      <p:sp>
-        <p:nvSpPr>
-          <p:cNvPr id="9" name="Rounded Rectangle 8"/>
+              <a:t>현행화 되지 않은 직무 정보</a:t>
+            </a:r>
+          </a:p>
+        </p:txBody>
+      </p:sp>
+      <p:sp>
+        <p:nvSpPr>
+          <p:cNvPr id="11" name="Rounded Rectangle 10"/>
           <p:cNvSpPr/>
           <p:nvPr/>
         </p:nvSpPr>
         <p:spPr>
           <a:xfrm>
-            <a:off x="5134356" y="2316175"/>
-            <a:ext cx="4140403" cy="453542"/>
+            <a:off x="631850" y="2354580"/>
+            <a:ext cx="932688" cy="457200"/>
+          </a:xfrm>
+          <a:prstGeom prst="roundRect">
+            <a:avLst/>
+          </a:prstGeom>
+          <a:solidFill>
+            <a:srgbClr val="1D1D1D"/>
+          </a:solidFill>
+          <a:ln>
+            <a:noFill/>
+          </a:ln>
+        </p:spPr>
+        <p:style>
+          <a:lnRef idx="1">
+            <a:schemeClr val="accent1"/>
+          </a:lnRef>
+          <a:fillRef idx="3">
+            <a:schemeClr val="accent1"/>
+          </a:fillRef>
+          <a:effectRef idx="2">
+            <a:schemeClr val="accent1"/>
+          </a:effectRef>
+          <a:fontRef idx="minor">
+            <a:schemeClr val="lt1"/>
+          </a:fontRef>
+        </p:style>
+        <p:txBody>
+          <a:bodyPr rtlCol="0" anchor="ctr" wrap="square" lIns="64008" rIns="36576" tIns="18288" bIns="18288"/>
+          <a:lstStyle/>
+          <a:p>
+            <a:pPr algn="ctr">
+              <a:lnSpc>
+                <a:spcPct val="112000"/>
+              </a:lnSpc>
+            </a:pPr>
+            <a:r>
+              <a:rPr sz="900" b="1" i="0">
+                <a:solidFill>
+                  <a:srgbClr val="FFFFFF"/>
+                </a:solidFill>
+                <a:latin typeface="맑은 고딕"/>
+                <a:ea typeface="맑은 고딕"/>
+              </a:rPr>
+              <a:t>노후 데이터</a:t>
+            </a:r>
+          </a:p>
+        </p:txBody>
+      </p:sp>
+      <p:sp>
+        <p:nvSpPr>
+          <p:cNvPr id="12" name="Rounded Rectangle 11"/>
+          <p:cNvSpPr/>
+          <p:nvPr/>
+        </p:nvSpPr>
+        <p:spPr>
+          <a:xfrm>
+            <a:off x="4345228" y="2400300"/>
+            <a:ext cx="1143000" cy="356616"/>
+          </a:xfrm>
+          <a:prstGeom prst="roundRect">
+            <a:avLst/>
+          </a:prstGeom>
+          <a:solidFill>
+            <a:srgbClr val="919191"/>
+          </a:solidFill>
+          <a:ln>
+            <a:noFill/>
+          </a:ln>
+        </p:spPr>
+        <p:style>
+          <a:lnRef idx="1">
+            <a:schemeClr val="accent1"/>
+          </a:lnRef>
+          <a:fillRef idx="3">
+            <a:schemeClr val="accent1"/>
+          </a:fillRef>
+          <a:effectRef idx="2">
+            <a:schemeClr val="accent1"/>
+          </a:effectRef>
+          <a:fontRef idx="minor">
+            <a:schemeClr val="lt1"/>
+          </a:fontRef>
+        </p:style>
+        <p:txBody>
+          <a:bodyPr rtlCol="0" anchor="ctr" wrap="square" lIns="64008" rIns="36576" tIns="18288" bIns="18288"/>
+          <a:lstStyle/>
+          <a:p>
+            <a:pPr algn="ctr">
+              <a:lnSpc>
+                <a:spcPct val="112000"/>
+              </a:lnSpc>
+            </a:pPr>
+            <a:r>
+              <a:rPr sz="900" b="1" i="0">
+                <a:solidFill>
+                  <a:srgbClr val="FFFFFF"/>
+                </a:solidFill>
+                <a:latin typeface="맑은 고딕"/>
+                <a:ea typeface="맑은 고딕"/>
+              </a:rPr>
+              <a:t>현행화</a:t>
+            </a:r>
+          </a:p>
+        </p:txBody>
+      </p:sp>
+      <p:sp>
+        <p:nvSpPr>
+          <p:cNvPr id="13" name="Rounded Rectangle 12"/>
+          <p:cNvSpPr/>
+          <p:nvPr/>
+        </p:nvSpPr>
+        <p:spPr>
+          <a:xfrm>
+            <a:off x="5134356" y="2354580"/>
+            <a:ext cx="4140403" cy="457200"/>
           </a:xfrm>
           <a:prstGeom prst="roundRect">
             <a:avLst/>
@@ -25623,28 +26759,28 @@
               </a:lnSpc>
             </a:pPr>
             <a:r>
-              <a:rPr sz="1000" b="0" i="0">
+              <a:rPr sz="900" b="0" i="0">
                 <a:solidFill>
                   <a:srgbClr val="404040"/>
                 </a:solidFill>
                 <a:latin typeface="맑은 고딕"/>
                 <a:ea typeface="맑은 고딕"/>
               </a:rPr>
-              <a:t>AI 직무기술서로 전(全)직무 현행화</a:t>
-            </a:r>
-          </a:p>
-        </p:txBody>
-      </p:sp>
-      <p:sp>
-        <p:nvSpPr>
-          <p:cNvPr id="10" name="Rounded Rectangle 9"/>
+              <a:t>설계 과정의 Interview / Survey 등 구성원 부담</a:t>
+            </a:r>
+          </a:p>
+        </p:txBody>
+      </p:sp>
+      <p:sp>
+        <p:nvSpPr>
+          <p:cNvPr id="14" name="Rounded Rectangle 13"/>
           <p:cNvSpPr/>
           <p:nvPr/>
         </p:nvSpPr>
         <p:spPr>
           <a:xfrm>
-            <a:off x="631850" y="2854756"/>
-            <a:ext cx="4140403" cy="453542"/>
+            <a:off x="1627632" y="2889504"/>
+            <a:ext cx="3145536" cy="457200"/>
           </a:xfrm>
           <a:prstGeom prst="roundRect">
             <a:avLst/>
@@ -25680,28 +26816,142 @@
               </a:lnSpc>
             </a:pPr>
             <a:r>
-              <a:rPr sz="1000" b="0" i="0">
+              <a:rPr sz="900" b="0" i="0">
                 <a:solidFill>
                   <a:srgbClr val="404040"/>
                 </a:solidFill>
                 <a:latin typeface="맑은 고딕"/>
                 <a:ea typeface="맑은 고딕"/>
               </a:rPr>
-              <a:t>생산직 평가 기준 미흡 — 직군 특성 미반영</a:t>
-            </a:r>
-          </a:p>
-        </p:txBody>
-      </p:sp>
-      <p:sp>
-        <p:nvSpPr>
-          <p:cNvPr id="11" name="Rounded Rectangle 10"/>
+              <a:t>직무가치 평가에 평가자 주관 개입</a:t>
+            </a:r>
+          </a:p>
+        </p:txBody>
+      </p:sp>
+      <p:sp>
+        <p:nvSpPr>
+          <p:cNvPr id="15" name="Rounded Rectangle 14"/>
           <p:cNvSpPr/>
           <p:nvPr/>
         </p:nvSpPr>
         <p:spPr>
           <a:xfrm>
-            <a:off x="5134356" y="2854756"/>
-            <a:ext cx="4140403" cy="453542"/>
+            <a:off x="631850" y="2889504"/>
+            <a:ext cx="932688" cy="457200"/>
+          </a:xfrm>
+          <a:prstGeom prst="roundRect">
+            <a:avLst/>
+          </a:prstGeom>
+          <a:solidFill>
+            <a:srgbClr val="1D1D1D"/>
+          </a:solidFill>
+          <a:ln>
+            <a:noFill/>
+          </a:ln>
+        </p:spPr>
+        <p:style>
+          <a:lnRef idx="1">
+            <a:schemeClr val="accent1"/>
+          </a:lnRef>
+          <a:fillRef idx="3">
+            <a:schemeClr val="accent1"/>
+          </a:fillRef>
+          <a:effectRef idx="2">
+            <a:schemeClr val="accent1"/>
+          </a:effectRef>
+          <a:fontRef idx="minor">
+            <a:schemeClr val="lt1"/>
+          </a:fontRef>
+        </p:style>
+        <p:txBody>
+          <a:bodyPr rtlCol="0" anchor="ctr" wrap="square" lIns="64008" rIns="36576" tIns="18288" bIns="18288"/>
+          <a:lstStyle/>
+          <a:p>
+            <a:pPr algn="ctr">
+              <a:lnSpc>
+                <a:spcPct val="112000"/>
+              </a:lnSpc>
+            </a:pPr>
+            <a:r>
+              <a:rPr sz="900" b="1" i="0">
+                <a:solidFill>
+                  <a:srgbClr val="FFFFFF"/>
+                </a:solidFill>
+                <a:latin typeface="맑은 고딕"/>
+                <a:ea typeface="맑은 고딕"/>
+              </a:rPr>
+              <a:t>객관성 시비</a:t>
+            </a:r>
+          </a:p>
+        </p:txBody>
+      </p:sp>
+      <p:sp>
+        <p:nvSpPr>
+          <p:cNvPr id="16" name="Rounded Rectangle 15"/>
+          <p:cNvSpPr/>
+          <p:nvPr/>
+        </p:nvSpPr>
+        <p:spPr>
+          <a:xfrm>
+            <a:off x="4345228" y="2935224"/>
+            <a:ext cx="1143000" cy="356616"/>
+          </a:xfrm>
+          <a:prstGeom prst="roundRect">
+            <a:avLst/>
+          </a:prstGeom>
+          <a:solidFill>
+            <a:srgbClr val="919191"/>
+          </a:solidFill>
+          <a:ln>
+            <a:noFill/>
+          </a:ln>
+        </p:spPr>
+        <p:style>
+          <a:lnRef idx="1">
+            <a:schemeClr val="accent1"/>
+          </a:lnRef>
+          <a:fillRef idx="3">
+            <a:schemeClr val="accent1"/>
+          </a:fillRef>
+          <a:effectRef idx="2">
+            <a:schemeClr val="accent1"/>
+          </a:effectRef>
+          <a:fontRef idx="minor">
+            <a:schemeClr val="lt1"/>
+          </a:fontRef>
+        </p:style>
+        <p:txBody>
+          <a:bodyPr rtlCol="0" anchor="ctr" wrap="square" lIns="64008" rIns="36576" tIns="18288" bIns="18288"/>
+          <a:lstStyle/>
+          <a:p>
+            <a:pPr algn="ctr">
+              <a:lnSpc>
+                <a:spcPct val="112000"/>
+              </a:lnSpc>
+            </a:pPr>
+            <a:r>
+              <a:rPr sz="900" b="1" i="0">
+                <a:solidFill>
+                  <a:srgbClr val="FFFFFF"/>
+                </a:solidFill>
+                <a:latin typeface="맑은 고딕"/>
+                <a:ea typeface="맑은 고딕"/>
+              </a:rPr>
+              <a:t>기준 확립</a:t>
+            </a:r>
+          </a:p>
+        </p:txBody>
+      </p:sp>
+      <p:sp>
+        <p:nvSpPr>
+          <p:cNvPr id="17" name="Rounded Rectangle 16"/>
+          <p:cNvSpPr/>
+          <p:nvPr/>
+        </p:nvSpPr>
+        <p:spPr>
+          <a:xfrm>
+            <a:off x="5134356" y="2889504"/>
+            <a:ext cx="4140403" cy="457200"/>
           </a:xfrm>
           <a:prstGeom prst="roundRect">
             <a:avLst/>
@@ -25737,28 +26987,28 @@
               </a:lnSpc>
             </a:pPr>
             <a:r>
-              <a:rPr sz="1000" b="0" i="0">
+              <a:rPr sz="900" b="0" i="0">
                 <a:solidFill>
                   <a:srgbClr val="404040"/>
                 </a:solidFill>
                 <a:latin typeface="맑은 고딕"/>
                 <a:ea typeface="맑은 고딕"/>
               </a:rPr>
-              <a:t>직군별 차별화 평가모델 (성과/투입/역량 지향)</a:t>
-            </a:r>
-          </a:p>
-        </p:txBody>
-      </p:sp>
-      <p:sp>
-        <p:nvSpPr>
-          <p:cNvPr id="12" name="Rounded Rectangle 11"/>
+              <a:t>일부 직군·구성원 수용성 저하로 평가 결과 불만</a:t>
+            </a:r>
+          </a:p>
+        </p:txBody>
+      </p:sp>
+      <p:sp>
+        <p:nvSpPr>
+          <p:cNvPr id="18" name="Rounded Rectangle 17"/>
           <p:cNvSpPr/>
           <p:nvPr/>
         </p:nvSpPr>
         <p:spPr>
           <a:xfrm>
-            <a:off x="631850" y="3393338"/>
-            <a:ext cx="4140403" cy="453542"/>
+            <a:off x="1627632" y="3424428"/>
+            <a:ext cx="3145536" cy="457200"/>
           </a:xfrm>
           <a:prstGeom prst="roundRect">
             <a:avLst/>
@@ -25794,28 +27044,142 @@
               </a:lnSpc>
             </a:pPr>
             <a:r>
-              <a:rPr sz="1000" b="0" i="0">
+              <a:rPr sz="900" b="0" i="0">
                 <a:solidFill>
                   <a:srgbClr val="404040"/>
                 </a:solidFill>
                 <a:latin typeface="맑은 고딕"/>
                 <a:ea typeface="맑은 고딕"/>
               </a:rPr>
-              <a:t>보상 차등화 근거 부족 — 직무가치 미반영</a:t>
-            </a:r>
-          </a:p>
-        </p:txBody>
-      </p:sp>
-      <p:sp>
-        <p:nvSpPr>
-          <p:cNvPr id="13" name="Rounded Rectangle 12"/>
+              <a:t>실시간성 떨어지는 목표설정 / 성과관리</a:t>
+            </a:r>
+          </a:p>
+        </p:txBody>
+      </p:sp>
+      <p:sp>
+        <p:nvSpPr>
+          <p:cNvPr id="19" name="Rounded Rectangle 18"/>
           <p:cNvSpPr/>
           <p:nvPr/>
         </p:nvSpPr>
         <p:spPr>
           <a:xfrm>
-            <a:off x="5134356" y="3393338"/>
-            <a:ext cx="4140403" cy="453542"/>
+            <a:off x="631850" y="3424428"/>
+            <a:ext cx="932688" cy="457200"/>
+          </a:xfrm>
+          <a:prstGeom prst="roundRect">
+            <a:avLst/>
+          </a:prstGeom>
+          <a:solidFill>
+            <a:srgbClr val="1D1D1D"/>
+          </a:solidFill>
+          <a:ln>
+            <a:noFill/>
+          </a:ln>
+        </p:spPr>
+        <p:style>
+          <a:lnRef idx="1">
+            <a:schemeClr val="accent1"/>
+          </a:lnRef>
+          <a:fillRef idx="3">
+            <a:schemeClr val="accent1"/>
+          </a:fillRef>
+          <a:effectRef idx="2">
+            <a:schemeClr val="accent1"/>
+          </a:effectRef>
+          <a:fontRef idx="minor">
+            <a:schemeClr val="lt1"/>
+          </a:fontRef>
+        </p:style>
+        <p:txBody>
+          <a:bodyPr rtlCol="0" anchor="ctr" wrap="square" lIns="64008" rIns="36576" tIns="18288" bIns="18288"/>
+          <a:lstStyle/>
+          <a:p>
+            <a:pPr algn="ctr">
+              <a:lnSpc>
+                <a:spcPct val="112000"/>
+              </a:lnSpc>
+            </a:pPr>
+            <a:r>
+              <a:rPr sz="900" b="1" i="0">
+                <a:solidFill>
+                  <a:srgbClr val="FFFFFF"/>
+                </a:solidFill>
+                <a:latin typeface="맑은 고딕"/>
+                <a:ea typeface="맑은 고딕"/>
+              </a:rPr>
+              <a:t>사후적 관리</a:t>
+            </a:r>
+          </a:p>
+        </p:txBody>
+      </p:sp>
+      <p:sp>
+        <p:nvSpPr>
+          <p:cNvPr id="20" name="Rounded Rectangle 19"/>
+          <p:cNvSpPr/>
+          <p:nvPr/>
+        </p:nvSpPr>
+        <p:spPr>
+          <a:xfrm>
+            <a:off x="4345228" y="3470148"/>
+            <a:ext cx="1143000" cy="356616"/>
+          </a:xfrm>
+          <a:prstGeom prst="roundRect">
+            <a:avLst/>
+          </a:prstGeom>
+          <a:solidFill>
+            <a:srgbClr val="919191"/>
+          </a:solidFill>
+          <a:ln>
+            <a:noFill/>
+          </a:ln>
+        </p:spPr>
+        <p:style>
+          <a:lnRef idx="1">
+            <a:schemeClr val="accent1"/>
+          </a:lnRef>
+          <a:fillRef idx="3">
+            <a:schemeClr val="accent1"/>
+          </a:fillRef>
+          <a:effectRef idx="2">
+            <a:schemeClr val="accent1"/>
+          </a:effectRef>
+          <a:fontRef idx="minor">
+            <a:schemeClr val="lt1"/>
+          </a:fontRef>
+        </p:style>
+        <p:txBody>
+          <a:bodyPr rtlCol="0" anchor="ctr" wrap="square" lIns="64008" rIns="36576" tIns="18288" bIns="18288"/>
+          <a:lstStyle/>
+          <a:p>
+            <a:pPr algn="ctr">
+              <a:lnSpc>
+                <a:spcPct val="112000"/>
+              </a:lnSpc>
+            </a:pPr>
+            <a:r>
+              <a:rPr sz="900" b="1" i="0">
+                <a:solidFill>
+                  <a:srgbClr val="FFFFFF"/>
+                </a:solidFill>
+                <a:latin typeface="맑은 고딕"/>
+                <a:ea typeface="맑은 고딕"/>
+              </a:rPr>
+              <a:t>시스템 활용</a:t>
+            </a:r>
+          </a:p>
+        </p:txBody>
+      </p:sp>
+      <p:sp>
+        <p:nvSpPr>
+          <p:cNvPr id="21" name="Rounded Rectangle 20"/>
+          <p:cNvSpPr/>
+          <p:nvPr/>
+        </p:nvSpPr>
+        <p:spPr>
+          <a:xfrm>
+            <a:off x="5134356" y="3424428"/>
+            <a:ext cx="4140403" cy="457200"/>
           </a:xfrm>
           <a:prstGeom prst="roundRect">
             <a:avLst/>
@@ -25851,28 +27215,28 @@
               </a:lnSpc>
             </a:pPr>
             <a:r>
-              <a:rPr sz="1000" b="0" i="0">
+              <a:rPr sz="900" b="0" i="0">
                 <a:solidFill>
                   <a:srgbClr val="404040"/>
                 </a:solidFill>
                 <a:latin typeface="맑은 고딕"/>
                 <a:ea typeface="맑은 고딕"/>
               </a:rPr>
-              <a:t>직무가치 기반 Pay 정책선·차등 설계</a:t>
-            </a:r>
-          </a:p>
-        </p:txBody>
-      </p:sp>
-      <p:sp>
-        <p:nvSpPr>
-          <p:cNvPr id="14" name="Rounded Rectangle 13"/>
+              <a:t>Global HR System 활용 시 고객사와 잘 맞지 않음</a:t>
+            </a:r>
+          </a:p>
+        </p:txBody>
+      </p:sp>
+      <p:sp>
+        <p:nvSpPr>
+          <p:cNvPr id="22" name="Rounded Rectangle 21"/>
           <p:cNvSpPr/>
           <p:nvPr/>
         </p:nvSpPr>
         <p:spPr>
           <a:xfrm>
-            <a:off x="631850" y="3931920"/>
-            <a:ext cx="4140403" cy="453542"/>
+            <a:off x="1627632" y="3959352"/>
+            <a:ext cx="3145536" cy="457200"/>
           </a:xfrm>
           <a:prstGeom prst="roundRect">
             <a:avLst/>
@@ -25908,28 +27272,142 @@
               </a:lnSpc>
             </a:pPr>
             <a:r>
-              <a:rPr sz="1000" b="0" i="0">
+              <a:rPr sz="900" b="0" i="0">
                 <a:solidFill>
                   <a:srgbClr val="404040"/>
                 </a:solidFill>
                 <a:latin typeface="맑은 고딕"/>
                 <a:ea typeface="맑은 고딕"/>
               </a:rPr>
-              <a:t>전통적 컨설팅 — Interview/Survey로 구성원 부담·장기 소요</a:t>
-            </a:r>
-          </a:p>
-        </p:txBody>
-      </p:sp>
-      <p:sp>
-        <p:nvSpPr>
-          <p:cNvPr id="15" name="Rounded Rectangle 14"/>
+              <a:t>직무 가치 / 난이도와 괴리된 보상체계</a:t>
+            </a:r>
+          </a:p>
+        </p:txBody>
+      </p:sp>
+      <p:sp>
+        <p:nvSpPr>
+          <p:cNvPr id="23" name="Rounded Rectangle 22"/>
           <p:cNvSpPr/>
           <p:nvPr/>
         </p:nvSpPr>
         <p:spPr>
           <a:xfrm>
-            <a:off x="5134356" y="3931920"/>
-            <a:ext cx="4140403" cy="453542"/>
+            <a:off x="631850" y="3959352"/>
+            <a:ext cx="932688" cy="457200"/>
+          </a:xfrm>
+          <a:prstGeom prst="roundRect">
+            <a:avLst/>
+          </a:prstGeom>
+          <a:solidFill>
+            <a:srgbClr val="1D1D1D"/>
+          </a:solidFill>
+          <a:ln>
+            <a:noFill/>
+          </a:ln>
+        </p:spPr>
+        <p:style>
+          <a:lnRef idx="1">
+            <a:schemeClr val="accent1"/>
+          </a:lnRef>
+          <a:fillRef idx="3">
+            <a:schemeClr val="accent1"/>
+          </a:fillRef>
+          <a:effectRef idx="2">
+            <a:schemeClr val="accent1"/>
+          </a:effectRef>
+          <a:fontRef idx="minor">
+            <a:schemeClr val="lt1"/>
+          </a:fontRef>
+        </p:style>
+        <p:txBody>
+          <a:bodyPr rtlCol="0" anchor="ctr" wrap="square" lIns="64008" rIns="36576" tIns="18288" bIns="18288"/>
+          <a:lstStyle/>
+          <a:p>
+            <a:pPr algn="ctr">
+              <a:lnSpc>
+                <a:spcPct val="112000"/>
+              </a:lnSpc>
+            </a:pPr>
+            <a:r>
+              <a:rPr sz="900" b="1" i="0">
+                <a:solidFill>
+                  <a:srgbClr val="FFFFFF"/>
+                </a:solidFill>
+                <a:latin typeface="맑은 고딕"/>
+                <a:ea typeface="맑은 고딕"/>
+              </a:rPr>
+              <a:t>보상 불일치</a:t>
+            </a:r>
+          </a:p>
+        </p:txBody>
+      </p:sp>
+      <p:sp>
+        <p:nvSpPr>
+          <p:cNvPr id="24" name="Rounded Rectangle 23"/>
+          <p:cNvSpPr/>
+          <p:nvPr/>
+        </p:nvSpPr>
+        <p:spPr>
+          <a:xfrm>
+            <a:off x="4345228" y="4005072"/>
+            <a:ext cx="1143000" cy="356616"/>
+          </a:xfrm>
+          <a:prstGeom prst="roundRect">
+            <a:avLst/>
+          </a:prstGeom>
+          <a:solidFill>
+            <a:srgbClr val="919191"/>
+          </a:solidFill>
+          <a:ln>
+            <a:noFill/>
+          </a:ln>
+        </p:spPr>
+        <p:style>
+          <a:lnRef idx="1">
+            <a:schemeClr val="accent1"/>
+          </a:lnRef>
+          <a:fillRef idx="3">
+            <a:schemeClr val="accent1"/>
+          </a:fillRef>
+          <a:effectRef idx="2">
+            <a:schemeClr val="accent1"/>
+          </a:effectRef>
+          <a:fontRef idx="minor">
+            <a:schemeClr val="lt1"/>
+          </a:fontRef>
+        </p:style>
+        <p:txBody>
+          <a:bodyPr rtlCol="0" anchor="ctr" wrap="square" lIns="64008" rIns="36576" tIns="18288" bIns="18288"/>
+          <a:lstStyle/>
+          <a:p>
+            <a:pPr algn="ctr">
+              <a:lnSpc>
+                <a:spcPct val="112000"/>
+              </a:lnSpc>
+            </a:pPr>
+            <a:r>
+              <a:rPr sz="900" b="1" i="0">
+                <a:solidFill>
+                  <a:srgbClr val="FFFFFF"/>
+                </a:solidFill>
+                <a:latin typeface="맑은 고딕"/>
+                <a:ea typeface="맑은 고딕"/>
+              </a:rPr>
+              <a:t>보상 Align</a:t>
+            </a:r>
+          </a:p>
+        </p:txBody>
+      </p:sp>
+      <p:sp>
+        <p:nvSpPr>
+          <p:cNvPr id="25" name="Rounded Rectangle 24"/>
+          <p:cNvSpPr/>
+          <p:nvPr/>
+        </p:nvSpPr>
+        <p:spPr>
+          <a:xfrm>
+            <a:off x="5134356" y="3959352"/>
+            <a:ext cx="4140403" cy="457200"/>
           </a:xfrm>
           <a:prstGeom prst="roundRect">
             <a:avLst/>
@@ -25965,14 +27443,356 @@
               </a:lnSpc>
             </a:pPr>
             <a:r>
-              <a:rPr sz="1000" b="0" i="0">
+              <a:rPr sz="900" b="0" i="0">
                 <a:solidFill>
                   <a:srgbClr val="404040"/>
                 </a:solidFill>
                 <a:latin typeface="맑은 고딕"/>
                 <a:ea typeface="맑은 고딕"/>
               </a:rPr>
-              <a:t>표준 설계도 기반 — 시간/비용/부담 최소화</a:t>
+              <a:t>직무체계 없는 보상 Coupling으로 실용성 저하</a:t>
+            </a:r>
+          </a:p>
+        </p:txBody>
+      </p:sp>
+      <p:sp>
+        <p:nvSpPr>
+          <p:cNvPr id="26" name="Rounded Rectangle 25"/>
+          <p:cNvSpPr/>
+          <p:nvPr/>
+        </p:nvSpPr>
+        <p:spPr>
+          <a:xfrm>
+            <a:off x="1627632" y="4494276"/>
+            <a:ext cx="3145536" cy="457200"/>
+          </a:xfrm>
+          <a:prstGeom prst="roundRect">
+            <a:avLst/>
+          </a:prstGeom>
+          <a:noFill/>
+          <a:ln w="6350">
+            <a:solidFill>
+              <a:schemeClr val="dk1"/>
+            </a:solidFill>
+          </a:ln>
+        </p:spPr>
+        <p:style>
+          <a:lnRef idx="1">
+            <a:schemeClr val="accent1"/>
+          </a:lnRef>
+          <a:fillRef idx="3">
+            <a:schemeClr val="accent1"/>
+          </a:fillRef>
+          <a:effectRef idx="2">
+            <a:schemeClr val="accent1"/>
+          </a:effectRef>
+          <a:fontRef idx="minor">
+            <a:schemeClr val="lt1"/>
+          </a:fontRef>
+        </p:style>
+        <p:txBody>
+          <a:bodyPr rtlCol="0" anchor="ctr" wrap="square" lIns="64008" rIns="36576" tIns="18288" bIns="18288"/>
+          <a:lstStyle/>
+          <a:p>
+            <a:pPr algn="l">
+              <a:lnSpc>
+                <a:spcPct val="112000"/>
+              </a:lnSpc>
+            </a:pPr>
+            <a:r>
+              <a:rPr sz="900" b="0" i="0">
+                <a:solidFill>
+                  <a:srgbClr val="404040"/>
+                </a:solidFill>
+                <a:latin typeface="맑은 고딕"/>
+                <a:ea typeface="맑은 고딕"/>
+              </a:rPr>
+              <a:t>현재 이슈 대응의 프로젝트성 접근</a:t>
+            </a:r>
+          </a:p>
+        </p:txBody>
+      </p:sp>
+      <p:sp>
+        <p:nvSpPr>
+          <p:cNvPr id="27" name="Rounded Rectangle 26"/>
+          <p:cNvSpPr/>
+          <p:nvPr/>
+        </p:nvSpPr>
+        <p:spPr>
+          <a:xfrm>
+            <a:off x="631850" y="4494276"/>
+            <a:ext cx="932688" cy="457200"/>
+          </a:xfrm>
+          <a:prstGeom prst="roundRect">
+            <a:avLst/>
+          </a:prstGeom>
+          <a:solidFill>
+            <a:srgbClr val="1D1D1D"/>
+          </a:solidFill>
+          <a:ln>
+            <a:noFill/>
+          </a:ln>
+        </p:spPr>
+        <p:style>
+          <a:lnRef idx="1">
+            <a:schemeClr val="accent1"/>
+          </a:lnRef>
+          <a:fillRef idx="3">
+            <a:schemeClr val="accent1"/>
+          </a:fillRef>
+          <a:effectRef idx="2">
+            <a:schemeClr val="accent1"/>
+          </a:effectRef>
+          <a:fontRef idx="minor">
+            <a:schemeClr val="lt1"/>
+          </a:fontRef>
+        </p:style>
+        <p:txBody>
+          <a:bodyPr rtlCol="0" anchor="ctr" wrap="square" lIns="64008" rIns="36576" tIns="18288" bIns="18288"/>
+          <a:lstStyle/>
+          <a:p>
+            <a:pPr algn="ctr">
+              <a:lnSpc>
+                <a:spcPct val="112000"/>
+              </a:lnSpc>
+            </a:pPr>
+            <a:r>
+              <a:rPr sz="900" b="1" i="0">
+                <a:solidFill>
+                  <a:srgbClr val="FFFFFF"/>
+                </a:solidFill>
+                <a:latin typeface="맑은 고딕"/>
+                <a:ea typeface="맑은 고딕"/>
+              </a:rPr>
+              <a:t>단편적 접근</a:t>
+            </a:r>
+          </a:p>
+        </p:txBody>
+      </p:sp>
+      <p:sp>
+        <p:nvSpPr>
+          <p:cNvPr id="28" name="Rounded Rectangle 27"/>
+          <p:cNvSpPr/>
+          <p:nvPr/>
+        </p:nvSpPr>
+        <p:spPr>
+          <a:xfrm>
+            <a:off x="4345228" y="4539996"/>
+            <a:ext cx="1143000" cy="356616"/>
+          </a:xfrm>
+          <a:prstGeom prst="roundRect">
+            <a:avLst/>
+          </a:prstGeom>
+          <a:solidFill>
+            <a:srgbClr val="919191"/>
+          </a:solidFill>
+          <a:ln>
+            <a:noFill/>
+          </a:ln>
+        </p:spPr>
+        <p:style>
+          <a:lnRef idx="1">
+            <a:schemeClr val="accent1"/>
+          </a:lnRef>
+          <a:fillRef idx="3">
+            <a:schemeClr val="accent1"/>
+          </a:fillRef>
+          <a:effectRef idx="2">
+            <a:schemeClr val="accent1"/>
+          </a:effectRef>
+          <a:fontRef idx="minor">
+            <a:schemeClr val="lt1"/>
+          </a:fontRef>
+        </p:style>
+        <p:txBody>
+          <a:bodyPr rtlCol="0" anchor="ctr" wrap="square" lIns="64008" rIns="36576" tIns="18288" bIns="18288"/>
+          <a:lstStyle/>
+          <a:p>
+            <a:pPr algn="ctr">
+              <a:lnSpc>
+                <a:spcPct val="112000"/>
+              </a:lnSpc>
+            </a:pPr>
+            <a:r>
+              <a:rPr sz="900" b="1" i="0">
+                <a:solidFill>
+                  <a:srgbClr val="FFFFFF"/>
+                </a:solidFill>
+                <a:latin typeface="맑은 고딕"/>
+                <a:ea typeface="맑은 고딕"/>
+              </a:rPr>
+              <a:t>사후관리</a:t>
+            </a:r>
+          </a:p>
+        </p:txBody>
+      </p:sp>
+      <p:sp>
+        <p:nvSpPr>
+          <p:cNvPr id="29" name="Rounded Rectangle 28"/>
+          <p:cNvSpPr/>
+          <p:nvPr/>
+        </p:nvSpPr>
+        <p:spPr>
+          <a:xfrm>
+            <a:off x="5134356" y="4494276"/>
+            <a:ext cx="4140403" cy="457200"/>
+          </a:xfrm>
+          <a:prstGeom prst="roundRect">
+            <a:avLst/>
+          </a:prstGeom>
+          <a:noFill/>
+          <a:ln w="6350">
+            <a:solidFill>
+              <a:schemeClr val="dk1"/>
+            </a:solidFill>
+          </a:ln>
+        </p:spPr>
+        <p:style>
+          <a:lnRef idx="1">
+            <a:schemeClr val="accent1"/>
+          </a:lnRef>
+          <a:fillRef idx="3">
+            <a:schemeClr val="accent1"/>
+          </a:fillRef>
+          <a:effectRef idx="2">
+            <a:schemeClr val="accent1"/>
+          </a:effectRef>
+          <a:fontRef idx="minor">
+            <a:schemeClr val="lt1"/>
+          </a:fontRef>
+        </p:style>
+        <p:txBody>
+          <a:bodyPr rtlCol="0" anchor="ctr" wrap="square" lIns="64008" rIns="36576" tIns="18288" bIns="18288"/>
+          <a:lstStyle/>
+          <a:p>
+            <a:pPr algn="l">
+              <a:lnSpc>
+                <a:spcPct val="112000"/>
+              </a:lnSpc>
+            </a:pPr>
+            <a:r>
+              <a:rPr sz="900" b="0" i="0">
+                <a:solidFill>
+                  <a:srgbClr val="404040"/>
+                </a:solidFill>
+                <a:latin typeface="맑은 고딕"/>
+                <a:ea typeface="맑은 고딕"/>
+              </a:rPr>
+              <a:t>프로젝트 이후 사후관리 부재로 컨설팅 유명무실화</a:t>
+            </a:r>
+          </a:p>
+        </p:txBody>
+      </p:sp>
+      <p:sp>
+        <p:nvSpPr>
+          <p:cNvPr id="30" name="Rounded Rectangle 29"/>
+          <p:cNvSpPr/>
+          <p:nvPr/>
+        </p:nvSpPr>
+        <p:spPr>
+          <a:xfrm>
+            <a:off x="631850" y="5138928"/>
+            <a:ext cx="4140403" cy="841248"/>
+          </a:xfrm>
+          <a:prstGeom prst="roundRect">
+            <a:avLst/>
+          </a:prstGeom>
+          <a:solidFill>
+            <a:srgbClr val="D9D9D9"/>
+          </a:solidFill>
+          <a:ln>
+            <a:noFill/>
+          </a:ln>
+        </p:spPr>
+        <p:style>
+          <a:lnRef idx="1">
+            <a:schemeClr val="accent1"/>
+          </a:lnRef>
+          <a:fillRef idx="3">
+            <a:schemeClr val="accent1"/>
+          </a:fillRef>
+          <a:effectRef idx="2">
+            <a:schemeClr val="accent1"/>
+          </a:effectRef>
+          <a:fontRef idx="minor">
+            <a:schemeClr val="lt1"/>
+          </a:fontRef>
+        </p:style>
+        <p:txBody>
+          <a:bodyPr rtlCol="0" anchor="ctr" wrap="square" lIns="64008" rIns="36576" tIns="18288" bIns="18288"/>
+          <a:lstStyle/>
+          <a:p>
+            <a:pPr algn="ctr">
+              <a:lnSpc>
+                <a:spcPct val="112000"/>
+              </a:lnSpc>
+            </a:pPr>
+            <a:r>
+              <a:rPr sz="1000" b="1" i="0">
+                <a:solidFill>
+                  <a:srgbClr val="404040"/>
+                </a:solidFill>
+                <a:latin typeface="맑은 고딕"/>
+                <a:ea typeface="맑은 고딕"/>
+              </a:rPr>
+              <a:t>파편화된 데이터와 수동적 HR 운영의 악순환</a:t>
+            </a:r>
+          </a:p>
+        </p:txBody>
+      </p:sp>
+      <p:sp>
+        <p:nvSpPr>
+          <p:cNvPr id="31" name="Rounded Rectangle 30"/>
+          <p:cNvSpPr/>
+          <p:nvPr/>
+        </p:nvSpPr>
+        <p:spPr>
+          <a:xfrm>
+            <a:off x="5134356" y="5138928"/>
+            <a:ext cx="4140403" cy="841248"/>
+          </a:xfrm>
+          <a:prstGeom prst="roundRect">
+            <a:avLst/>
+          </a:prstGeom>
+          <a:solidFill>
+            <a:srgbClr val="921F0B"/>
+          </a:solidFill>
+          <a:ln>
+            <a:noFill/>
+          </a:ln>
+        </p:spPr>
+        <p:style>
+          <a:lnRef idx="1">
+            <a:schemeClr val="accent1"/>
+          </a:lnRef>
+          <a:fillRef idx="3">
+            <a:schemeClr val="accent1"/>
+          </a:fillRef>
+          <a:effectRef idx="2">
+            <a:schemeClr val="accent1"/>
+          </a:effectRef>
+          <a:fontRef idx="minor">
+            <a:schemeClr val="lt1"/>
+          </a:fontRef>
+        </p:style>
+        <p:txBody>
+          <a:bodyPr rtlCol="0" anchor="ctr" wrap="square" lIns="64008" rIns="36576" tIns="18288" bIns="18288"/>
+          <a:lstStyle/>
+          <a:p>
+            <a:pPr algn="ctr">
+              <a:lnSpc>
+                <a:spcPct val="112000"/>
+              </a:lnSpc>
+            </a:pPr>
+            <a:r>
+              <a:rPr sz="1000" b="1" i="0">
+                <a:solidFill>
+                  <a:srgbClr val="FFFFFF"/>
+                </a:solidFill>
+                <a:latin typeface="맑은 고딕"/>
+                <a:ea typeface="맑은 고딕"/>
+              </a:rPr>
+              <a:t>유기적 연결이 부족한 1회성 컨설팅 결과물</a:t>
             </a:r>
           </a:p>
         </p:txBody>
@@ -26045,13 +27865,15 @@
         </p:nvSpPr>
         <p:spPr>
           <a:xfrm>
-            <a:off x="631850" y="1468526"/>
-            <a:ext cx="4140403" cy="304495"/>
+            <a:off x="630936" y="2011680"/>
+            <a:ext cx="4133087" cy="3749039"/>
           </a:xfrm>
           <a:prstGeom prst="roundRect">
             <a:avLst/>
           </a:prstGeom>
-          <a:noFill/>
+          <a:solidFill>
+            <a:srgbClr val="D9D9D9"/>
+          </a:solidFill>
           <a:ln>
             <a:noFill/>
           </a:ln>
@@ -26074,41 +27896,255 @@
           <a:bodyPr rtlCol="0" anchor="ctr" wrap="square" lIns="64008" rIns="36576" tIns="18288" bIns="18288"/>
           <a:lstStyle/>
           <a:p>
-            <a:pPr algn="ctr">
-              <a:lnSpc>
-                <a:spcPct val="112000"/>
-              </a:lnSpc>
-            </a:pPr>
-            <a:r>
-              <a:rPr sz="1100" b="1" i="0">
-                <a:solidFill>
-                  <a:srgbClr val="FFFFFF"/>
-                </a:solidFill>
-                <a:latin typeface="맑은 고딕"/>
-                <a:ea typeface="맑은 고딕"/>
-              </a:rPr>
-              <a:t>Legacy Consulting</a:t>
-            </a:r>
-          </a:p>
-        </p:txBody>
-      </p:sp>
-      <p:sp>
-        <p:nvSpPr>
-          <p:cNvPr id="5" name="Rounded Rectangle 4"/>
-          <p:cNvSpPr/>
-          <p:nvPr/>
-        </p:nvSpPr>
-        <p:spPr>
-          <a:xfrm>
-            <a:off x="5134356" y="1468526"/>
-            <a:ext cx="4140403" cy="304495"/>
-          </a:xfrm>
-          <a:prstGeom prst="roundRect">
+            <a:pPr algn="l">
+              <a:lnSpc>
+                <a:spcPct val="112000"/>
+              </a:lnSpc>
+            </a:pPr>
+            <a:r>
+              <a:rPr sz="1100" b="0" i="0">
+                <a:latin typeface="맑은 고딕"/>
+                <a:ea typeface="맑은 고딕"/>
+              </a:rPr>
+              <a:t/>
+            </a:r>
+          </a:p>
+        </p:txBody>
+      </p:sp>
+      <p:sp>
+        <p:nvSpPr>
+          <p:cNvPr id="5" name="TextBox 4"/>
+          <p:cNvSpPr txBox="1"/>
+          <p:nvPr/>
+        </p:nvSpPr>
+        <p:spPr>
+          <a:xfrm>
+            <a:off x="731520" y="2103120"/>
+            <a:ext cx="3931920" cy="365760"/>
+          </a:xfrm>
+          <a:prstGeom prst="rect">
             <a:avLst/>
           </a:prstGeom>
           <a:noFill/>
           <a:ln>
             <a:noFill/>
+          </a:ln>
+        </p:spPr>
+        <p:txBody>
+          <a:bodyPr wrap="square" lIns="27432" rIns="27432" tIns="18288" bIns="18288">
+            <a:spAutoFit/>
+          </a:bodyPr>
+          <a:lstStyle/>
+          <a:p>
+            <a:pPr algn="l">
+              <a:lnSpc>
+                <a:spcPct val="112000"/>
+              </a:lnSpc>
+            </a:pPr>
+            <a:r>
+              <a:rPr sz="1200" b="1" i="0">
+                <a:solidFill>
+                  <a:srgbClr val="404040"/>
+                </a:solidFill>
+                <a:latin typeface="맑은 고딕"/>
+                <a:ea typeface="맑은 고딕"/>
+              </a:rPr>
+              <a:t>Legacy Consulting</a:t>
+            </a:r>
+          </a:p>
+        </p:txBody>
+      </p:sp>
+      <p:sp>
+        <p:nvSpPr>
+          <p:cNvPr id="6" name="TextBox 5"/>
+          <p:cNvSpPr txBox="1"/>
+          <p:nvPr/>
+        </p:nvSpPr>
+        <p:spPr>
+          <a:xfrm>
+            <a:off x="841248" y="2670048"/>
+            <a:ext cx="3730752" cy="640080"/>
+          </a:xfrm>
+          <a:prstGeom prst="rect">
+            <a:avLst/>
+          </a:prstGeom>
+          <a:noFill/>
+          <a:ln>
+            <a:noFill/>
+          </a:ln>
+        </p:spPr>
+        <p:txBody>
+          <a:bodyPr wrap="square" lIns="27432" rIns="27432" tIns="18288" bIns="18288">
+            <a:spAutoFit/>
+          </a:bodyPr>
+          <a:lstStyle/>
+          <a:p>
+            <a:pPr algn="l">
+              <a:lnSpc>
+                <a:spcPct val="112000"/>
+              </a:lnSpc>
+            </a:pPr>
+            <a:r>
+              <a:rPr sz="1000" b="0" i="0">
+                <a:solidFill>
+                  <a:srgbClr val="404040"/>
+                </a:solidFill>
+                <a:latin typeface="맑은 고딕"/>
+                <a:ea typeface="맑은 고딕"/>
+              </a:rPr>
+              <a:t>• 맞춤 구축 — 시간/비용/복잡성 ↑</a:t>
+            </a:r>
+          </a:p>
+        </p:txBody>
+      </p:sp>
+      <p:sp>
+        <p:nvSpPr>
+          <p:cNvPr id="7" name="TextBox 6"/>
+          <p:cNvSpPr txBox="1"/>
+          <p:nvPr/>
+        </p:nvSpPr>
+        <p:spPr>
+          <a:xfrm>
+            <a:off x="841248" y="3346704"/>
+            <a:ext cx="3730752" cy="640080"/>
+          </a:xfrm>
+          <a:prstGeom prst="rect">
+            <a:avLst/>
+          </a:prstGeom>
+          <a:noFill/>
+          <a:ln>
+            <a:noFill/>
+          </a:ln>
+        </p:spPr>
+        <p:txBody>
+          <a:bodyPr wrap="square" lIns="27432" rIns="27432" tIns="18288" bIns="18288">
+            <a:spAutoFit/>
+          </a:bodyPr>
+          <a:lstStyle/>
+          <a:p>
+            <a:pPr algn="l">
+              <a:lnSpc>
+                <a:spcPct val="112000"/>
+              </a:lnSpc>
+            </a:pPr>
+            <a:r>
+              <a:rPr sz="1000" b="0" i="0">
+                <a:solidFill>
+                  <a:srgbClr val="404040"/>
+                </a:solidFill>
+                <a:latin typeface="맑은 고딕"/>
+                <a:ea typeface="맑은 고딕"/>
+              </a:rPr>
+              <a:t>• 대량 리소스·구성원 업무조사 부담</a:t>
+            </a:r>
+          </a:p>
+        </p:txBody>
+      </p:sp>
+      <p:sp>
+        <p:nvSpPr>
+          <p:cNvPr id="8" name="TextBox 7"/>
+          <p:cNvSpPr txBox="1"/>
+          <p:nvPr/>
+        </p:nvSpPr>
+        <p:spPr>
+          <a:xfrm>
+            <a:off x="841248" y="4023360"/>
+            <a:ext cx="3730752" cy="640080"/>
+          </a:xfrm>
+          <a:prstGeom prst="rect">
+            <a:avLst/>
+          </a:prstGeom>
+          <a:noFill/>
+          <a:ln>
+            <a:noFill/>
+          </a:ln>
+        </p:spPr>
+        <p:txBody>
+          <a:bodyPr wrap="square" lIns="27432" rIns="27432" tIns="18288" bIns="18288">
+            <a:spAutoFit/>
+          </a:bodyPr>
+          <a:lstStyle/>
+          <a:p>
+            <a:pPr algn="l">
+              <a:lnSpc>
+                <a:spcPct val="112000"/>
+              </a:lnSpc>
+            </a:pPr>
+            <a:r>
+              <a:rPr sz="1000" b="0" i="0">
+                <a:solidFill>
+                  <a:srgbClr val="404040"/>
+                </a:solidFill>
+                <a:latin typeface="맑은 고딕"/>
+                <a:ea typeface="맑은 고딕"/>
+              </a:rPr>
+              <a:t>• 산출물 간 低연계·사후관리 부족</a:t>
+            </a:r>
+          </a:p>
+        </p:txBody>
+      </p:sp>
+      <p:sp>
+        <p:nvSpPr>
+          <p:cNvPr id="9" name="TextBox 8"/>
+          <p:cNvSpPr txBox="1"/>
+          <p:nvPr/>
+        </p:nvSpPr>
+        <p:spPr>
+          <a:xfrm>
+            <a:off x="841248" y="4700016"/>
+            <a:ext cx="3730752" cy="640080"/>
+          </a:xfrm>
+          <a:prstGeom prst="rect">
+            <a:avLst/>
+          </a:prstGeom>
+          <a:noFill/>
+          <a:ln>
+            <a:noFill/>
+          </a:ln>
+        </p:spPr>
+        <p:txBody>
+          <a:bodyPr wrap="square" lIns="27432" rIns="27432" tIns="18288" bIns="18288">
+            <a:spAutoFit/>
+          </a:bodyPr>
+          <a:lstStyle/>
+          <a:p>
+            <a:pPr algn="l">
+              <a:lnSpc>
+                <a:spcPct val="112000"/>
+              </a:lnSpc>
+            </a:pPr>
+            <a:r>
+              <a:rPr sz="1000" b="0" i="0">
+                <a:solidFill>
+                  <a:srgbClr val="404040"/>
+                </a:solidFill>
+                <a:latin typeface="맑은 고딕"/>
+                <a:ea typeface="맑은 고딕"/>
+              </a:rPr>
+              <a:t>• 글로벌 표준 vs 국내 현장 간 Gap</a:t>
+            </a:r>
+          </a:p>
+        </p:txBody>
+      </p:sp>
+      <p:sp>
+        <p:nvSpPr>
+          <p:cNvPr id="10" name="Rounded Rectangle 9"/>
+          <p:cNvSpPr/>
+          <p:nvPr/>
+        </p:nvSpPr>
+        <p:spPr>
+          <a:xfrm>
+            <a:off x="5166360" y="2011680"/>
+            <a:ext cx="4069080" cy="3749039"/>
+          </a:xfrm>
+          <a:prstGeom prst="roundRect">
+            <a:avLst/>
+          </a:prstGeom>
+          <a:noFill/>
+          <a:ln w="6350">
+            <a:solidFill>
+              <a:schemeClr val="dk1"/>
+            </a:solidFill>
           </a:ln>
         </p:spPr>
         <p:style>
@@ -26129,43 +28165,255 @@
           <a:bodyPr rtlCol="0" anchor="ctr" wrap="square" lIns="64008" rIns="36576" tIns="18288" bIns="18288"/>
           <a:lstStyle/>
           <a:p>
-            <a:pPr algn="ctr">
-              <a:lnSpc>
-                <a:spcPct val="112000"/>
-              </a:lnSpc>
-            </a:pPr>
-            <a:r>
-              <a:rPr sz="1100" b="1" i="0">
-                <a:solidFill>
-                  <a:srgbClr val="FFFFFF"/>
-                </a:solidFill>
-                <a:latin typeface="맑은 고딕"/>
-                <a:ea typeface="맑은 고딕"/>
-              </a:rPr>
-              <a:t>HCG Approach (표준 설계도 + AI)</a:t>
-            </a:r>
-          </a:p>
-        </p:txBody>
-      </p:sp>
-      <p:sp>
-        <p:nvSpPr>
-          <p:cNvPr id="6" name="Rounded Rectangle 5"/>
+            <a:pPr algn="l">
+              <a:lnSpc>
+                <a:spcPct val="112000"/>
+              </a:lnSpc>
+            </a:pPr>
+            <a:r>
+              <a:rPr sz="1100" b="0" i="0">
+                <a:latin typeface="맑은 고딕"/>
+                <a:ea typeface="맑은 고딕"/>
+              </a:rPr>
+              <a:t/>
+            </a:r>
+          </a:p>
+        </p:txBody>
+      </p:sp>
+      <p:sp>
+        <p:nvSpPr>
+          <p:cNvPr id="11" name="TextBox 10"/>
+          <p:cNvSpPr txBox="1"/>
+          <p:nvPr/>
+        </p:nvSpPr>
+        <p:spPr>
+          <a:xfrm>
+            <a:off x="5285232" y="2103120"/>
+            <a:ext cx="3840480" cy="365760"/>
+          </a:xfrm>
+          <a:prstGeom prst="rect">
+            <a:avLst/>
+          </a:prstGeom>
+          <a:noFill/>
+          <a:ln>
+            <a:noFill/>
+          </a:ln>
+        </p:spPr>
+        <p:txBody>
+          <a:bodyPr wrap="square" lIns="27432" rIns="27432" tIns="18288" bIns="18288">
+            <a:spAutoFit/>
+          </a:bodyPr>
+          <a:lstStyle/>
+          <a:p>
+            <a:pPr algn="l">
+              <a:lnSpc>
+                <a:spcPct val="112000"/>
+              </a:lnSpc>
+            </a:pPr>
+            <a:r>
+              <a:rPr sz="1200" b="1" i="0">
+                <a:solidFill>
+                  <a:srgbClr val="921F0B"/>
+                </a:solidFill>
+                <a:latin typeface="맑은 고딕"/>
+                <a:ea typeface="맑은 고딕"/>
+              </a:rPr>
+              <a:t>HCG's Proposition (표준 설계도 + AI)</a:t>
+            </a:r>
+          </a:p>
+        </p:txBody>
+      </p:sp>
+      <p:sp>
+        <p:nvSpPr>
+          <p:cNvPr id="12" name="TextBox 11"/>
+          <p:cNvSpPr txBox="1"/>
+          <p:nvPr/>
+        </p:nvSpPr>
+        <p:spPr>
+          <a:xfrm>
+            <a:off x="5376672" y="2670048"/>
+            <a:ext cx="3703320" cy="640080"/>
+          </a:xfrm>
+          <a:prstGeom prst="rect">
+            <a:avLst/>
+          </a:prstGeom>
+          <a:noFill/>
+          <a:ln>
+            <a:noFill/>
+          </a:ln>
+        </p:spPr>
+        <p:txBody>
+          <a:bodyPr wrap="square" lIns="27432" rIns="27432" tIns="18288" bIns="18288">
+            <a:spAutoFit/>
+          </a:bodyPr>
+          <a:lstStyle/>
+          <a:p>
+            <a:pPr algn="l">
+              <a:lnSpc>
+                <a:spcPct val="112000"/>
+              </a:lnSpc>
+            </a:pPr>
+            <a:r>
+              <a:rPr sz="1000" b="0" i="0">
+                <a:solidFill>
+                  <a:srgbClr val="404040"/>
+                </a:solidFill>
+                <a:latin typeface="맑은 고딕"/>
+                <a:ea typeface="맑은 고딕"/>
+              </a:rPr>
+              <a:t>• 국제표준(APQC·ESCO·ISCO·O*NET·NCS) 기반 빠른 초안</a:t>
+            </a:r>
+          </a:p>
+        </p:txBody>
+      </p:sp>
+      <p:sp>
+        <p:nvSpPr>
+          <p:cNvPr id="13" name="TextBox 12"/>
+          <p:cNvSpPr txBox="1"/>
+          <p:nvPr/>
+        </p:nvSpPr>
+        <p:spPr>
+          <a:xfrm>
+            <a:off x="5376672" y="3346704"/>
+            <a:ext cx="3703320" cy="640080"/>
+          </a:xfrm>
+          <a:prstGeom prst="rect">
+            <a:avLst/>
+          </a:prstGeom>
+          <a:noFill/>
+          <a:ln>
+            <a:noFill/>
+          </a:ln>
+        </p:spPr>
+        <p:txBody>
+          <a:bodyPr wrap="square" lIns="27432" rIns="27432" tIns="18288" bIns="18288">
+            <a:spAutoFit/>
+          </a:bodyPr>
+          <a:lstStyle/>
+          <a:p>
+            <a:pPr algn="l">
+              <a:lnSpc>
+                <a:spcPct val="112000"/>
+              </a:lnSpc>
+            </a:pPr>
+            <a:r>
+              <a:rPr sz="1000" b="0" i="0">
+                <a:solidFill>
+                  <a:srgbClr val="404040"/>
+                </a:solidFill>
+                <a:latin typeface="맑은 고딕"/>
+                <a:ea typeface="맑은 고딕"/>
+              </a:rPr>
+              <a:t>• AI 직무기술서 — 조사 부담 최소화</a:t>
+            </a:r>
+          </a:p>
+        </p:txBody>
+      </p:sp>
+      <p:sp>
+        <p:nvSpPr>
+          <p:cNvPr id="14" name="TextBox 13"/>
+          <p:cNvSpPr txBox="1"/>
+          <p:nvPr/>
+        </p:nvSpPr>
+        <p:spPr>
+          <a:xfrm>
+            <a:off x="5376672" y="4023360"/>
+            <a:ext cx="3703320" cy="640080"/>
+          </a:xfrm>
+          <a:prstGeom prst="rect">
+            <a:avLst/>
+          </a:prstGeom>
+          <a:noFill/>
+          <a:ln>
+            <a:noFill/>
+          </a:ln>
+        </p:spPr>
+        <p:txBody>
+          <a:bodyPr wrap="square" lIns="27432" rIns="27432" tIns="18288" bIns="18288">
+            <a:spAutoFit/>
+          </a:bodyPr>
+          <a:lstStyle/>
+          <a:p>
+            <a:pPr algn="l">
+              <a:lnSpc>
+                <a:spcPct val="112000"/>
+              </a:lnSpc>
+            </a:pPr>
+            <a:r>
+              <a:rPr sz="1000" b="0" i="0">
+                <a:solidFill>
+                  <a:srgbClr val="404040"/>
+                </a:solidFill>
+                <a:latin typeface="맑은 고딕"/>
+                <a:ea typeface="맑은 고딕"/>
+              </a:rPr>
+              <a:t>• 직무→평가→보상 일관 연계 설계</a:t>
+            </a:r>
+          </a:p>
+        </p:txBody>
+      </p:sp>
+      <p:sp>
+        <p:nvSpPr>
+          <p:cNvPr id="15" name="TextBox 14"/>
+          <p:cNvSpPr txBox="1"/>
+          <p:nvPr/>
+        </p:nvSpPr>
+        <p:spPr>
+          <a:xfrm>
+            <a:off x="5376672" y="4700016"/>
+            <a:ext cx="3703320" cy="640080"/>
+          </a:xfrm>
+          <a:prstGeom prst="rect">
+            <a:avLst/>
+          </a:prstGeom>
+          <a:noFill/>
+          <a:ln>
+            <a:noFill/>
+          </a:ln>
+        </p:spPr>
+        <p:txBody>
+          <a:bodyPr wrap="square" lIns="27432" rIns="27432" tIns="18288" bIns="18288">
+            <a:spAutoFit/>
+          </a:bodyPr>
+          <a:lstStyle/>
+          <a:p>
+            <a:pPr algn="l">
+              <a:lnSpc>
+                <a:spcPct val="112000"/>
+              </a:lnSpc>
+            </a:pPr>
+            <a:r>
+              <a:rPr sz="1000" b="0" i="0">
+                <a:solidFill>
+                  <a:srgbClr val="404040"/>
+                </a:solidFill>
+                <a:latin typeface="맑은 고딕"/>
+                <a:ea typeface="맑은 고딕"/>
+              </a:rPr>
+              <a:t>• 지주 가이드·현장 맥락을 Custom으로 정합</a:t>
+            </a:r>
+          </a:p>
+        </p:txBody>
+      </p:sp>
+      <p:sp>
+        <p:nvSpPr>
+          <p:cNvPr id="16" name="Oval 15"/>
           <p:cNvSpPr/>
           <p:nvPr/>
         </p:nvSpPr>
         <p:spPr>
           <a:xfrm>
-            <a:off x="631850" y="1777593"/>
-            <a:ext cx="4140403" cy="453542"/>
-          </a:xfrm>
-          <a:prstGeom prst="roundRect">
-            <a:avLst/>
-          </a:prstGeom>
-          <a:noFill/>
-          <a:ln w="6350">
-            <a:solidFill>
-              <a:schemeClr val="dk1"/>
-            </a:solidFill>
+            <a:off x="4773168" y="3611880"/>
+            <a:ext cx="356616" cy="356616"/>
+          </a:xfrm>
+          <a:prstGeom prst="ellipse">
+            <a:avLst/>
+          </a:prstGeom>
+          <a:solidFill>
+            <a:srgbClr val="921F0B"/>
+          </a:solidFill>
+          <a:ln>
+            <a:noFill/>
           </a:ln>
         </p:spPr>
         <p:style>
@@ -26183,422 +28431,62 @@
           </a:fontRef>
         </p:style>
         <p:txBody>
-          <a:bodyPr rtlCol="0" anchor="ctr" wrap="square" lIns="64008" rIns="36576" tIns="18288" bIns="18288"/>
-          <a:lstStyle/>
-          <a:p>
-            <a:pPr algn="l">
-              <a:lnSpc>
-                <a:spcPct val="112000"/>
-              </a:lnSpc>
-            </a:pPr>
-            <a:r>
-              <a:rPr sz="1000" b="0" i="0">
-                <a:solidFill>
-                  <a:srgbClr val="404040"/>
-                </a:solidFill>
-                <a:latin typeface="맑은 고딕"/>
-                <a:ea typeface="맑은 고딕"/>
-              </a:rPr>
-              <a:t>맞춤 구축 — 시간/비용/복잡성 ↑</a:t>
-            </a:r>
-          </a:p>
-        </p:txBody>
-      </p:sp>
-      <p:sp>
-        <p:nvSpPr>
-          <p:cNvPr id="7" name="Rounded Rectangle 6"/>
-          <p:cNvSpPr/>
-          <p:nvPr/>
-        </p:nvSpPr>
-        <p:spPr>
-          <a:xfrm>
-            <a:off x="5134356" y="1777593"/>
-            <a:ext cx="4140403" cy="453542"/>
-          </a:xfrm>
-          <a:prstGeom prst="roundRect">
+          <a:bodyPr rtlCol="0" anchor="ctr"/>
+          <a:lstStyle/>
+          <a:p>
+            <a:pPr algn="ctr"/>
+            <a:r>
+              <a:rPr sz="1000" b="1" i="0">
+                <a:solidFill>
+                  <a:srgbClr val="FFFFFF"/>
+                </a:solidFill>
+                <a:latin typeface="맑은 고딕"/>
+                <a:ea typeface="맑은 고딕"/>
+              </a:rPr>
+              <a:t>VS</a:t>
+            </a:r>
+          </a:p>
+        </p:txBody>
+      </p:sp>
+      <p:sp>
+        <p:nvSpPr>
+          <p:cNvPr id="17" name="TextBox 16"/>
+          <p:cNvSpPr txBox="1"/>
+          <p:nvPr/>
+        </p:nvSpPr>
+        <p:spPr>
+          <a:xfrm>
+            <a:off x="1005840" y="6035040"/>
+            <a:ext cx="7900416" cy="274320"/>
+          </a:xfrm>
+          <a:prstGeom prst="rect">
             <a:avLst/>
           </a:prstGeom>
           <a:noFill/>
-          <a:ln w="6350">
-            <a:solidFill>
-              <a:schemeClr val="dk1"/>
-            </a:solidFill>
-          </a:ln>
-        </p:spPr>
-        <p:style>
-          <a:lnRef idx="1">
-            <a:schemeClr val="accent1"/>
-          </a:lnRef>
-          <a:fillRef idx="3">
-            <a:schemeClr val="accent1"/>
-          </a:fillRef>
-          <a:effectRef idx="2">
-            <a:schemeClr val="accent1"/>
-          </a:effectRef>
-          <a:fontRef idx="minor">
-            <a:schemeClr val="lt1"/>
-          </a:fontRef>
-        </p:style>
-        <p:txBody>
-          <a:bodyPr rtlCol="0" anchor="ctr" wrap="square" lIns="64008" rIns="36576" tIns="18288" bIns="18288"/>
-          <a:lstStyle/>
-          <a:p>
-            <a:pPr algn="l">
-              <a:lnSpc>
-                <a:spcPct val="112000"/>
-              </a:lnSpc>
-            </a:pPr>
-            <a:r>
-              <a:rPr sz="1000" b="0" i="0">
-                <a:solidFill>
-                  <a:srgbClr val="404040"/>
-                </a:solidFill>
-                <a:latin typeface="맑은 고딕"/>
-                <a:ea typeface="맑은 고딕"/>
-              </a:rPr>
-              <a:t>국제표준(APQC·ESCO·ISCO·O*NET·NCS) 기반 빠른 초안</a:t>
-            </a:r>
-          </a:p>
-        </p:txBody>
-      </p:sp>
-      <p:sp>
-        <p:nvSpPr>
-          <p:cNvPr id="8" name="Rounded Rectangle 7"/>
-          <p:cNvSpPr/>
-          <p:nvPr/>
-        </p:nvSpPr>
-        <p:spPr>
-          <a:xfrm>
-            <a:off x="631850" y="2316175"/>
-            <a:ext cx="4140403" cy="453542"/>
-          </a:xfrm>
-          <a:prstGeom prst="roundRect">
-            <a:avLst/>
-          </a:prstGeom>
-          <a:noFill/>
-          <a:ln w="6350">
-            <a:solidFill>
-              <a:schemeClr val="dk1"/>
-            </a:solidFill>
-          </a:ln>
-        </p:spPr>
-        <p:style>
-          <a:lnRef idx="1">
-            <a:schemeClr val="accent1"/>
-          </a:lnRef>
-          <a:fillRef idx="3">
-            <a:schemeClr val="accent1"/>
-          </a:fillRef>
-          <a:effectRef idx="2">
-            <a:schemeClr val="accent1"/>
-          </a:effectRef>
-          <a:fontRef idx="minor">
-            <a:schemeClr val="lt1"/>
-          </a:fontRef>
-        </p:style>
-        <p:txBody>
-          <a:bodyPr rtlCol="0" anchor="ctr" wrap="square" lIns="64008" rIns="36576" tIns="18288" bIns="18288"/>
-          <a:lstStyle/>
-          <a:p>
-            <a:pPr algn="l">
-              <a:lnSpc>
-                <a:spcPct val="112000"/>
-              </a:lnSpc>
-            </a:pPr>
-            <a:r>
-              <a:rPr sz="1000" b="0" i="0">
-                <a:solidFill>
-                  <a:srgbClr val="404040"/>
-                </a:solidFill>
-                <a:latin typeface="맑은 고딕"/>
-                <a:ea typeface="맑은 고딕"/>
-              </a:rPr>
-              <a:t>대량 리소스·구성원 업무조사 부담</a:t>
-            </a:r>
-          </a:p>
-        </p:txBody>
-      </p:sp>
-      <p:sp>
-        <p:nvSpPr>
-          <p:cNvPr id="9" name="Rounded Rectangle 8"/>
-          <p:cNvSpPr/>
-          <p:nvPr/>
-        </p:nvSpPr>
-        <p:spPr>
-          <a:xfrm>
-            <a:off x="5134356" y="2316175"/>
-            <a:ext cx="4140403" cy="453542"/>
-          </a:xfrm>
-          <a:prstGeom prst="roundRect">
-            <a:avLst/>
-          </a:prstGeom>
-          <a:noFill/>
-          <a:ln w="6350">
-            <a:solidFill>
-              <a:schemeClr val="dk1"/>
-            </a:solidFill>
-          </a:ln>
-        </p:spPr>
-        <p:style>
-          <a:lnRef idx="1">
-            <a:schemeClr val="accent1"/>
-          </a:lnRef>
-          <a:fillRef idx="3">
-            <a:schemeClr val="accent1"/>
-          </a:fillRef>
-          <a:effectRef idx="2">
-            <a:schemeClr val="accent1"/>
-          </a:effectRef>
-          <a:fontRef idx="minor">
-            <a:schemeClr val="lt1"/>
-          </a:fontRef>
-        </p:style>
-        <p:txBody>
-          <a:bodyPr rtlCol="0" anchor="ctr" wrap="square" lIns="64008" rIns="36576" tIns="18288" bIns="18288"/>
-          <a:lstStyle/>
-          <a:p>
-            <a:pPr algn="l">
-              <a:lnSpc>
-                <a:spcPct val="112000"/>
-              </a:lnSpc>
-            </a:pPr>
-            <a:r>
-              <a:rPr sz="1000" b="0" i="0">
-                <a:solidFill>
-                  <a:srgbClr val="404040"/>
-                </a:solidFill>
-                <a:latin typeface="맑은 고딕"/>
-                <a:ea typeface="맑은 고딕"/>
-              </a:rPr>
-              <a:t>AI 직무기술서 — 조사 부담 최소화</a:t>
-            </a:r>
-          </a:p>
-        </p:txBody>
-      </p:sp>
-      <p:sp>
-        <p:nvSpPr>
-          <p:cNvPr id="10" name="Rounded Rectangle 9"/>
-          <p:cNvSpPr/>
-          <p:nvPr/>
-        </p:nvSpPr>
-        <p:spPr>
-          <a:xfrm>
-            <a:off x="631850" y="2854756"/>
-            <a:ext cx="4140403" cy="453542"/>
-          </a:xfrm>
-          <a:prstGeom prst="roundRect">
-            <a:avLst/>
-          </a:prstGeom>
-          <a:noFill/>
-          <a:ln w="6350">
-            <a:solidFill>
-              <a:schemeClr val="dk1"/>
-            </a:solidFill>
-          </a:ln>
-        </p:spPr>
-        <p:style>
-          <a:lnRef idx="1">
-            <a:schemeClr val="accent1"/>
-          </a:lnRef>
-          <a:fillRef idx="3">
-            <a:schemeClr val="accent1"/>
-          </a:fillRef>
-          <a:effectRef idx="2">
-            <a:schemeClr val="accent1"/>
-          </a:effectRef>
-          <a:fontRef idx="minor">
-            <a:schemeClr val="lt1"/>
-          </a:fontRef>
-        </p:style>
-        <p:txBody>
-          <a:bodyPr rtlCol="0" anchor="ctr" wrap="square" lIns="64008" rIns="36576" tIns="18288" bIns="18288"/>
-          <a:lstStyle/>
-          <a:p>
-            <a:pPr algn="l">
-              <a:lnSpc>
-                <a:spcPct val="112000"/>
-              </a:lnSpc>
-            </a:pPr>
-            <a:r>
-              <a:rPr sz="1000" b="0" i="0">
-                <a:solidFill>
-                  <a:srgbClr val="404040"/>
-                </a:solidFill>
-                <a:latin typeface="맑은 고딕"/>
-                <a:ea typeface="맑은 고딕"/>
-              </a:rPr>
-              <a:t>산출물 간 低연계·사후관리 부족</a:t>
-            </a:r>
-          </a:p>
-        </p:txBody>
-      </p:sp>
-      <p:sp>
-        <p:nvSpPr>
-          <p:cNvPr id="11" name="Rounded Rectangle 10"/>
-          <p:cNvSpPr/>
-          <p:nvPr/>
-        </p:nvSpPr>
-        <p:spPr>
-          <a:xfrm>
-            <a:off x="5134356" y="2854756"/>
-            <a:ext cx="4140403" cy="453542"/>
-          </a:xfrm>
-          <a:prstGeom prst="roundRect">
-            <a:avLst/>
-          </a:prstGeom>
-          <a:noFill/>
-          <a:ln w="6350">
-            <a:solidFill>
-              <a:schemeClr val="dk1"/>
-            </a:solidFill>
-          </a:ln>
-        </p:spPr>
-        <p:style>
-          <a:lnRef idx="1">
-            <a:schemeClr val="accent1"/>
-          </a:lnRef>
-          <a:fillRef idx="3">
-            <a:schemeClr val="accent1"/>
-          </a:fillRef>
-          <a:effectRef idx="2">
-            <a:schemeClr val="accent1"/>
-          </a:effectRef>
-          <a:fontRef idx="minor">
-            <a:schemeClr val="lt1"/>
-          </a:fontRef>
-        </p:style>
-        <p:txBody>
-          <a:bodyPr rtlCol="0" anchor="ctr" wrap="square" lIns="64008" rIns="36576" tIns="18288" bIns="18288"/>
-          <a:lstStyle/>
-          <a:p>
-            <a:pPr algn="l">
-              <a:lnSpc>
-                <a:spcPct val="112000"/>
-              </a:lnSpc>
-            </a:pPr>
-            <a:r>
-              <a:rPr sz="1000" b="0" i="0">
-                <a:solidFill>
-                  <a:srgbClr val="404040"/>
-                </a:solidFill>
-                <a:latin typeface="맑은 고딕"/>
-                <a:ea typeface="맑은 고딕"/>
-              </a:rPr>
-              <a:t>직무→평가→보상 일관 연계 설계</a:t>
-            </a:r>
-          </a:p>
-        </p:txBody>
-      </p:sp>
-      <p:sp>
-        <p:nvSpPr>
-          <p:cNvPr id="12" name="Rounded Rectangle 11"/>
-          <p:cNvSpPr/>
-          <p:nvPr/>
-        </p:nvSpPr>
-        <p:spPr>
-          <a:xfrm>
-            <a:off x="631850" y="3393338"/>
-            <a:ext cx="4140403" cy="453542"/>
-          </a:xfrm>
-          <a:prstGeom prst="roundRect">
-            <a:avLst/>
-          </a:prstGeom>
-          <a:noFill/>
-          <a:ln w="6350">
-            <a:solidFill>
-              <a:schemeClr val="dk1"/>
-            </a:solidFill>
-          </a:ln>
-        </p:spPr>
-        <p:style>
-          <a:lnRef idx="1">
-            <a:schemeClr val="accent1"/>
-          </a:lnRef>
-          <a:fillRef idx="3">
-            <a:schemeClr val="accent1"/>
-          </a:fillRef>
-          <a:effectRef idx="2">
-            <a:schemeClr val="accent1"/>
-          </a:effectRef>
-          <a:fontRef idx="minor">
-            <a:schemeClr val="lt1"/>
-          </a:fontRef>
-        </p:style>
-        <p:txBody>
-          <a:bodyPr rtlCol="0" anchor="ctr" wrap="square" lIns="64008" rIns="36576" tIns="18288" bIns="18288"/>
-          <a:lstStyle/>
-          <a:p>
-            <a:pPr algn="l">
-              <a:lnSpc>
-                <a:spcPct val="112000"/>
-              </a:lnSpc>
-            </a:pPr>
-            <a:r>
-              <a:rPr sz="1000" b="0" i="0">
-                <a:solidFill>
-                  <a:srgbClr val="404040"/>
-                </a:solidFill>
-                <a:latin typeface="맑은 고딕"/>
-                <a:ea typeface="맑은 고딕"/>
-              </a:rPr>
-              <a:t>글로벌 표준 vs 국내 현장 간 Gap</a:t>
-            </a:r>
-          </a:p>
-        </p:txBody>
-      </p:sp>
-      <p:sp>
-        <p:nvSpPr>
-          <p:cNvPr id="13" name="Rounded Rectangle 12"/>
-          <p:cNvSpPr/>
-          <p:nvPr/>
-        </p:nvSpPr>
-        <p:spPr>
-          <a:xfrm>
-            <a:off x="5134356" y="3393338"/>
-            <a:ext cx="4140403" cy="453542"/>
-          </a:xfrm>
-          <a:prstGeom prst="roundRect">
-            <a:avLst/>
-          </a:prstGeom>
-          <a:noFill/>
-          <a:ln w="6350">
-            <a:solidFill>
-              <a:schemeClr val="dk1"/>
-            </a:solidFill>
-          </a:ln>
-        </p:spPr>
-        <p:style>
-          <a:lnRef idx="1">
-            <a:schemeClr val="accent1"/>
-          </a:lnRef>
-          <a:fillRef idx="3">
-            <a:schemeClr val="accent1"/>
-          </a:fillRef>
-          <a:effectRef idx="2">
-            <a:schemeClr val="accent1"/>
-          </a:effectRef>
-          <a:fontRef idx="minor">
-            <a:schemeClr val="lt1"/>
-          </a:fontRef>
-        </p:style>
-        <p:txBody>
-          <a:bodyPr rtlCol="0" anchor="ctr" wrap="square" lIns="64008" rIns="36576" tIns="18288" bIns="18288"/>
-          <a:lstStyle/>
-          <a:p>
-            <a:pPr algn="l">
-              <a:lnSpc>
-                <a:spcPct val="112000"/>
-              </a:lnSpc>
-            </a:pPr>
-            <a:r>
-              <a:rPr sz="1000" b="0" i="0">
-                <a:solidFill>
-                  <a:srgbClr val="404040"/>
-                </a:solidFill>
-                <a:latin typeface="맑은 고딕"/>
-                <a:ea typeface="맑은 고딕"/>
-              </a:rPr>
-              <a:t>지주 가이드·현장 맥락을 Custom으로 정합</a:t>
+          <a:ln>
+            <a:noFill/>
+          </a:ln>
+        </p:spPr>
+        <p:txBody>
+          <a:bodyPr wrap="square" lIns="27432" rIns="27432" tIns="18288" bIns="18288">
+            <a:spAutoFit/>
+          </a:bodyPr>
+          <a:lstStyle/>
+          <a:p>
+            <a:pPr algn="ctr">
+              <a:lnSpc>
+                <a:spcPct val="112000"/>
+              </a:lnSpc>
+            </a:pPr>
+            <a:r>
+              <a:rPr sz="1100" b="1" i="1">
+                <a:solidFill>
+                  <a:srgbClr val="921F0B"/>
+                </a:solidFill>
+                <a:latin typeface="맑은 고딕"/>
+                <a:ea typeface="맑은 고딕"/>
+              </a:rPr>
+              <a:t>“AI를 활용해 즉시 활용 가능한 고객 맞춤형 직무체계를 구축하고 직무 특성에 맞는 평가·보상으로 연계”</a:t>
             </a:r>
           </a:p>
         </p:txBody>
